--- a/ゲーム科2年/01_後期/ゲームプログラミング応用Ⅰ/09_複数Passでアウトライン.pptx
+++ b/ゲーム科2年/01_後期/ゲームプログラミング応用Ⅰ/09_複数Passでアウトライン.pptx
@@ -14,6 +14,8 @@
     <p:sldId id="263" r:id="rId8"/>
     <p:sldId id="264" r:id="rId9"/>
     <p:sldId id="265" r:id="rId10"/>
+    <p:sldId id="266" r:id="rId11"/>
+    <p:sldId id="267" r:id="rId12"/>
   </p:sldIdLst>
   <p:sldSz cx="12192000" cy="6858000"/>
   <p:notesSz cx="6858000" cy="9144000"/>
@@ -267,7 +269,7 @@
           <a:p>
             <a:fld id="{E9CC885B-4903-4D54-9A93-00025F12DED9}" type="datetimeFigureOut">
               <a:rPr kumimoji="1" lang="ja-JP" altLang="en-US" smtClean="0"/>
-              <a:t>2025/7/24</a:t>
+              <a:t>2025/7/25</a:t>
             </a:fld>
             <a:endParaRPr kumimoji="1" lang="ja-JP" altLang="en-US"/>
           </a:p>
@@ -497,7 +499,7 @@
           <a:p>
             <a:fld id="{E9CC885B-4903-4D54-9A93-00025F12DED9}" type="datetimeFigureOut">
               <a:rPr kumimoji="1" lang="ja-JP" altLang="en-US" smtClean="0"/>
-              <a:t>2025/7/24</a:t>
+              <a:t>2025/7/25</a:t>
             </a:fld>
             <a:endParaRPr kumimoji="1" lang="ja-JP" altLang="en-US"/>
           </a:p>
@@ -737,7 +739,7 @@
           <a:p>
             <a:fld id="{E9CC885B-4903-4D54-9A93-00025F12DED9}" type="datetimeFigureOut">
               <a:rPr kumimoji="1" lang="ja-JP" altLang="en-US" smtClean="0"/>
-              <a:t>2025/7/24</a:t>
+              <a:t>2025/7/25</a:t>
             </a:fld>
             <a:endParaRPr kumimoji="1" lang="ja-JP" altLang="en-US"/>
           </a:p>
@@ -967,7 +969,7 @@
           <a:p>
             <a:fld id="{E9CC885B-4903-4D54-9A93-00025F12DED9}" type="datetimeFigureOut">
               <a:rPr kumimoji="1" lang="ja-JP" altLang="en-US" smtClean="0"/>
-              <a:t>2025/7/24</a:t>
+              <a:t>2025/7/25</a:t>
             </a:fld>
             <a:endParaRPr kumimoji="1" lang="ja-JP" altLang="en-US"/>
           </a:p>
@@ -1242,7 +1244,7 @@
           <a:p>
             <a:fld id="{E9CC885B-4903-4D54-9A93-00025F12DED9}" type="datetimeFigureOut">
               <a:rPr kumimoji="1" lang="ja-JP" altLang="en-US" smtClean="0"/>
-              <a:t>2025/7/24</a:t>
+              <a:t>2025/7/25</a:t>
             </a:fld>
             <a:endParaRPr kumimoji="1" lang="ja-JP" altLang="en-US"/>
           </a:p>
@@ -1571,7 +1573,7 @@
           <a:p>
             <a:fld id="{E9CC885B-4903-4D54-9A93-00025F12DED9}" type="datetimeFigureOut">
               <a:rPr kumimoji="1" lang="ja-JP" altLang="en-US" smtClean="0"/>
-              <a:t>2025/7/24</a:t>
+              <a:t>2025/7/25</a:t>
             </a:fld>
             <a:endParaRPr kumimoji="1" lang="ja-JP" altLang="en-US"/>
           </a:p>
@@ -2047,7 +2049,7 @@
           <a:p>
             <a:fld id="{E9CC885B-4903-4D54-9A93-00025F12DED9}" type="datetimeFigureOut">
               <a:rPr kumimoji="1" lang="ja-JP" altLang="en-US" smtClean="0"/>
-              <a:t>2025/7/24</a:t>
+              <a:t>2025/7/25</a:t>
             </a:fld>
             <a:endParaRPr kumimoji="1" lang="ja-JP" altLang="en-US"/>
           </a:p>
@@ -2188,7 +2190,7 @@
           <a:p>
             <a:fld id="{E9CC885B-4903-4D54-9A93-00025F12DED9}" type="datetimeFigureOut">
               <a:rPr kumimoji="1" lang="ja-JP" altLang="en-US" smtClean="0"/>
-              <a:t>2025/7/24</a:t>
+              <a:t>2025/7/25</a:t>
             </a:fld>
             <a:endParaRPr kumimoji="1" lang="ja-JP" altLang="en-US"/>
           </a:p>
@@ -2301,7 +2303,7 @@
           <a:p>
             <a:fld id="{E9CC885B-4903-4D54-9A93-00025F12DED9}" type="datetimeFigureOut">
               <a:rPr kumimoji="1" lang="ja-JP" altLang="en-US" smtClean="0"/>
-              <a:t>2025/7/24</a:t>
+              <a:t>2025/7/25</a:t>
             </a:fld>
             <a:endParaRPr kumimoji="1" lang="ja-JP" altLang="en-US"/>
           </a:p>
@@ -2644,7 +2646,7 @@
           <a:p>
             <a:fld id="{E9CC885B-4903-4D54-9A93-00025F12DED9}" type="datetimeFigureOut">
               <a:rPr kumimoji="1" lang="ja-JP" altLang="en-US" smtClean="0"/>
-              <a:t>2025/7/24</a:t>
+              <a:t>2025/7/25</a:t>
             </a:fld>
             <a:endParaRPr kumimoji="1" lang="ja-JP" altLang="en-US"/>
           </a:p>
@@ -2932,7 +2934,7 @@
           <a:p>
             <a:fld id="{E9CC885B-4903-4D54-9A93-00025F12DED9}" type="datetimeFigureOut">
               <a:rPr kumimoji="1" lang="ja-JP" altLang="en-US" smtClean="0"/>
-              <a:t>2025/7/24</a:t>
+              <a:t>2025/7/25</a:t>
             </a:fld>
             <a:endParaRPr kumimoji="1" lang="ja-JP" altLang="en-US"/>
           </a:p>
@@ -3205,7 +3207,7 @@
           <a:p>
             <a:fld id="{E9CC885B-4903-4D54-9A93-00025F12DED9}" type="datetimeFigureOut">
               <a:rPr kumimoji="1" lang="ja-JP" altLang="en-US" smtClean="0"/>
-              <a:t>2025/7/24</a:t>
+              <a:t>2025/7/25</a:t>
             </a:fld>
             <a:endParaRPr kumimoji="1" lang="ja-JP" altLang="en-US"/>
           </a:p>
@@ -3637,7 +3639,7 @@
         <p:spPr>
           <a:xfrm>
             <a:off x="567542" y="491954"/>
-            <a:ext cx="3877985" cy="584775"/>
+            <a:ext cx="2646878" cy="584775"/>
           </a:xfrm>
           <a:prstGeom prst="rect">
             <a:avLst/>
@@ -3652,7 +3654,7 @@
           <a:p>
             <a:r>
               <a:rPr kumimoji="1" lang="ja-JP" altLang="en-US" sz="3200" b="1" u="sng" dirty="0"/>
-              <a:t>トゥーンシェーダー</a:t>
+              <a:t>アウトライン</a:t>
             </a:r>
             <a:endParaRPr kumimoji="1" lang="en-US" altLang="ja-JP" sz="3200" b="1" u="sng" dirty="0"/>
           </a:p>
@@ -3673,7 +3675,7 @@
         <p:spPr>
           <a:xfrm>
             <a:off x="567542" y="1216429"/>
-            <a:ext cx="7571303" cy="1200329"/>
+            <a:ext cx="10033516" cy="2677656"/>
           </a:xfrm>
           <a:prstGeom prst="rect">
             <a:avLst/>
@@ -3688,45 +3690,69 @@
           <a:p>
             <a:r>
               <a:rPr kumimoji="1" lang="ja-JP" altLang="en-US" sz="2400" dirty="0"/>
-              <a:t>前回のトゥーンシェーダーには問題が１つあります。</a:t>
+              <a:t>トゥーンシェーダーには</a:t>
+            </a:r>
+            <a:r>
+              <a:rPr kumimoji="1" lang="ja-JP" altLang="en-US" sz="2400" b="1" dirty="0">
+                <a:solidFill>
+                  <a:srgbClr val="FF0000"/>
+                </a:solidFill>
+              </a:rPr>
+              <a:t>アウトライン</a:t>
+            </a:r>
+            <a:r>
+              <a:rPr kumimoji="1" lang="ja-JP" altLang="en-US" sz="2400" dirty="0"/>
+              <a:t>があると見栄えが良くなります。</a:t>
             </a:r>
             <a:endParaRPr kumimoji="1" lang="en-US" altLang="ja-JP" sz="2400" dirty="0"/>
           </a:p>
           <a:p>
             <a:r>
-              <a:rPr lang="ja-JP" altLang="en-US" sz="2400" dirty="0"/>
-              <a:t>それは、</a:t>
-            </a:r>
+              <a:rPr kumimoji="1" lang="ja-JP" altLang="en-US" sz="2400" dirty="0"/>
+              <a:t>その場合、</a:t>
+            </a:r>
+            <a:endParaRPr kumimoji="1" lang="en-US" altLang="ja-JP" sz="2400" dirty="0"/>
+          </a:p>
+          <a:p>
+            <a:endParaRPr lang="en-US" altLang="ja-JP" sz="2400" dirty="0"/>
+          </a:p>
+          <a:p>
             <a:r>
               <a:rPr lang="ja-JP" altLang="en-US" sz="2400" b="1" dirty="0">
                 <a:solidFill>
                   <a:srgbClr val="FF0000"/>
                 </a:solidFill>
               </a:rPr>
-              <a:t>明るさの段階が２段階しかなく</a:t>
-            </a:r>
-            <a:r>
-              <a:rPr lang="ja-JP" altLang="en-US" sz="2400" dirty="0"/>
-              <a:t>、</a:t>
-            </a:r>
-            <a:endParaRPr lang="en-US" altLang="ja-JP" sz="2400" dirty="0"/>
-          </a:p>
-          <a:p>
-            <a:r>
-              <a:rPr kumimoji="1" lang="ja-JP" altLang="en-US" sz="2400" dirty="0"/>
-              <a:t>また</a:t>
-            </a:r>
+              <a:t>・トゥーンシェーダーで描画</a:t>
+            </a:r>
+            <a:endParaRPr lang="en-US" altLang="ja-JP" sz="2400" b="1" dirty="0">
+              <a:solidFill>
+                <a:srgbClr val="FF0000"/>
+              </a:solidFill>
+            </a:endParaRPr>
+          </a:p>
+          <a:p>
             <a:r>
               <a:rPr kumimoji="1" lang="ja-JP" altLang="en-US" sz="2400" b="1" dirty="0">
                 <a:solidFill>
                   <a:srgbClr val="FF0000"/>
                 </a:solidFill>
               </a:rPr>
-              <a:t>段階を増やすのが大変</a:t>
-            </a:r>
+              <a:t>・アウトラインを描画</a:t>
+            </a:r>
+            <a:endParaRPr kumimoji="1" lang="en-US" altLang="ja-JP" sz="2400" b="1" dirty="0">
+              <a:solidFill>
+                <a:srgbClr val="FF0000"/>
+              </a:solidFill>
+            </a:endParaRPr>
+          </a:p>
+          <a:p>
+            <a:endParaRPr lang="en-US" altLang="ja-JP" sz="2400" dirty="0"/>
+          </a:p>
+          <a:p>
             <a:r>
               <a:rPr kumimoji="1" lang="ja-JP" altLang="en-US" sz="2400" dirty="0"/>
-              <a:t>なことです。</a:t>
+              <a:t>この２つのプロセスが必要になります。</a:t>
             </a:r>
             <a:endParaRPr kumimoji="1" lang="en-US" altLang="ja-JP" sz="2400" dirty="0"/>
           </a:p>
@@ -3734,10 +3760,10 @@
       </p:sp>
       <p:pic>
         <p:nvPicPr>
-          <p:cNvPr id="3" name="図 2">
-            <a:extLst>
-              <a:ext uri="{FF2B5EF4-FFF2-40B4-BE49-F238E27FC236}">
-                <a16:creationId xmlns:a16="http://schemas.microsoft.com/office/drawing/2014/main" id="{D02AE7CF-63EF-4D06-8513-424EEC33C5D1}"/>
+          <p:cNvPr id="5" name="図 4">
+            <a:extLst>
+              <a:ext uri="{FF2B5EF4-FFF2-40B4-BE49-F238E27FC236}">
+                <a16:creationId xmlns:a16="http://schemas.microsoft.com/office/drawing/2014/main" id="{DE9F85F5-CEB0-49B5-97C5-073D4171AEC2}"/>
               </a:ext>
             </a:extLst>
           </p:cNvPr>
@@ -3754,20 +3780,312 @@
         </p:blipFill>
         <p:spPr>
           <a:xfrm>
-            <a:off x="567542" y="2556458"/>
-            <a:ext cx="4324943" cy="3243707"/>
+            <a:off x="6558862" y="2462123"/>
+            <a:ext cx="3711747" cy="3523810"/>
           </a:xfrm>
           <a:prstGeom prst="rect">
             <a:avLst/>
           </a:prstGeom>
         </p:spPr>
       </p:pic>
+    </p:spTree>
+    <p:extLst>
+      <p:ext uri="{BB962C8B-B14F-4D97-AF65-F5344CB8AC3E}">
+        <p14:creationId xmlns:p14="http://schemas.microsoft.com/office/powerpoint/2010/main" val="38792862"/>
+      </p:ext>
+    </p:extLst>
+  </p:cSld>
+  <p:clrMapOvr>
+    <a:masterClrMapping/>
+  </p:clrMapOvr>
+</p:sld>
+</file>
+
+<file path=ppt/slides/slide10.xml><?xml version="1.0" encoding="utf-8"?>
+<p:sld xmlns:a="http://schemas.openxmlformats.org/drawingml/2006/main" xmlns:r="http://schemas.openxmlformats.org/officeDocument/2006/relationships" xmlns:p="http://schemas.openxmlformats.org/presentationml/2006/main">
+  <p:cSld>
+    <p:spTree>
+      <p:nvGrpSpPr>
+        <p:cNvPr id="1" name=""/>
+        <p:cNvGrpSpPr/>
+        <p:nvPr/>
+      </p:nvGrpSpPr>
+      <p:grpSpPr>
+        <a:xfrm>
+          <a:off x="0" y="0"/>
+          <a:ext cx="0" cy="0"/>
+          <a:chOff x="0" y="0"/>
+          <a:chExt cx="0" cy="0"/>
+        </a:xfrm>
+      </p:grpSpPr>
+      <p:sp>
+        <p:nvSpPr>
+          <p:cNvPr id="4" name="テキスト ボックス 3">
+            <a:extLst>
+              <a:ext uri="{FF2B5EF4-FFF2-40B4-BE49-F238E27FC236}">
+                <a16:creationId xmlns:a16="http://schemas.microsoft.com/office/drawing/2014/main" id="{5A13BF46-B8C5-48AA-8308-C9ECFF431A18}"/>
+              </a:ext>
+            </a:extLst>
+          </p:cNvPr>
+          <p:cNvSpPr txBox="1"/>
+          <p:nvPr/>
+        </p:nvSpPr>
+        <p:spPr>
+          <a:xfrm>
+            <a:off x="567542" y="491954"/>
+            <a:ext cx="2646878" cy="584775"/>
+          </a:xfrm>
+          <a:prstGeom prst="rect">
+            <a:avLst/>
+          </a:prstGeom>
+          <a:noFill/>
+        </p:spPr>
+        <p:txBody>
+          <a:bodyPr wrap="none" rtlCol="0">
+            <a:spAutoFit/>
+          </a:bodyPr>
+          <a:lstStyle/>
+          <a:p>
+            <a:r>
+              <a:rPr kumimoji="1" lang="ja-JP" altLang="en-US" sz="3200" b="1" u="sng" dirty="0"/>
+              <a:t>アウトライン</a:t>
+            </a:r>
+            <a:endParaRPr kumimoji="1" lang="en-US" altLang="ja-JP" sz="3200" b="1" u="sng" dirty="0"/>
+          </a:p>
+        </p:txBody>
+      </p:sp>
+      <p:sp>
+        <p:nvSpPr>
+          <p:cNvPr id="6" name="テキスト ボックス 5">
+            <a:extLst>
+              <a:ext uri="{FF2B5EF4-FFF2-40B4-BE49-F238E27FC236}">
+                <a16:creationId xmlns:a16="http://schemas.microsoft.com/office/drawing/2014/main" id="{55830AD6-028B-4C4E-80BF-B70DFC1C3A46}"/>
+              </a:ext>
+            </a:extLst>
+          </p:cNvPr>
+          <p:cNvSpPr txBox="1"/>
+          <p:nvPr/>
+        </p:nvSpPr>
+        <p:spPr>
+          <a:xfrm>
+            <a:off x="567542" y="1216429"/>
+            <a:ext cx="7718780" cy="461665"/>
+          </a:xfrm>
+          <a:prstGeom prst="rect">
+            <a:avLst/>
+          </a:prstGeom>
+          <a:noFill/>
+        </p:spPr>
+        <p:txBody>
+          <a:bodyPr wrap="none" rtlCol="0">
+            <a:spAutoFit/>
+          </a:bodyPr>
+          <a:lstStyle/>
+          <a:p>
+            <a:r>
+              <a:rPr kumimoji="1" lang="ja-JP" altLang="en-US" sz="2400" b="1" dirty="0">
+                <a:solidFill>
+                  <a:srgbClr val="FF0000"/>
+                </a:solidFill>
+              </a:rPr>
+              <a:t>拡大</a:t>
+            </a:r>
+            <a:r>
+              <a:rPr kumimoji="1" lang="ja-JP" altLang="en-US" sz="2400" dirty="0"/>
+              <a:t>したい場合は</a:t>
+            </a:r>
+            <a:r>
+              <a:rPr kumimoji="1" lang="ja-JP" altLang="en-US" sz="2400" b="1" dirty="0">
+                <a:solidFill>
+                  <a:srgbClr val="FF0000"/>
+                </a:solidFill>
+              </a:rPr>
+              <a:t>頂点を法線の方向にずらせば</a:t>
+            </a:r>
+            <a:r>
+              <a:rPr kumimoji="1" lang="en-US" altLang="ja-JP" sz="2400" b="1" dirty="0">
+                <a:solidFill>
+                  <a:srgbClr val="FF0000"/>
+                </a:solidFill>
+              </a:rPr>
+              <a:t>OK</a:t>
+            </a:r>
+            <a:r>
+              <a:rPr kumimoji="1" lang="ja-JP" altLang="en-US" sz="2400" dirty="0"/>
+              <a:t>です</a:t>
+            </a:r>
+            <a:endParaRPr kumimoji="1" lang="en-US" altLang="ja-JP" sz="2400" dirty="0"/>
+          </a:p>
+        </p:txBody>
+      </p:sp>
       <p:pic>
         <p:nvPicPr>
-          <p:cNvPr id="7" name="図 6">
-            <a:extLst>
-              <a:ext uri="{FF2B5EF4-FFF2-40B4-BE49-F238E27FC236}">
-                <a16:creationId xmlns:a16="http://schemas.microsoft.com/office/drawing/2014/main" id="{82592F81-70BE-4B7F-9F97-4E6AE30DC9CC}"/>
+          <p:cNvPr id="3" name="図 2">
+            <a:extLst>
+              <a:ext uri="{FF2B5EF4-FFF2-40B4-BE49-F238E27FC236}">
+                <a16:creationId xmlns:a16="http://schemas.microsoft.com/office/drawing/2014/main" id="{11E90E45-0DD7-4040-8A3E-09F970F59626}"/>
+              </a:ext>
+            </a:extLst>
+          </p:cNvPr>
+          <p:cNvPicPr>
+            <a:picLocks noChangeAspect="1"/>
+          </p:cNvPicPr>
+          <p:nvPr/>
+        </p:nvPicPr>
+        <p:blipFill>
+          <a:blip r:embed="rId2"/>
+          <a:stretch>
+            <a:fillRect/>
+          </a:stretch>
+        </p:blipFill>
+        <p:spPr>
+          <a:xfrm>
+            <a:off x="567542" y="1817794"/>
+            <a:ext cx="5539042" cy="1408006"/>
+          </a:xfrm>
+          <a:prstGeom prst="rect">
+            <a:avLst/>
+          </a:prstGeom>
+        </p:spPr>
+      </p:pic>
+    </p:spTree>
+    <p:extLst>
+      <p:ext uri="{BB962C8B-B14F-4D97-AF65-F5344CB8AC3E}">
+        <p14:creationId xmlns:p14="http://schemas.microsoft.com/office/powerpoint/2010/main" val="1014573384"/>
+      </p:ext>
+    </p:extLst>
+  </p:cSld>
+  <p:clrMapOvr>
+    <a:masterClrMapping/>
+  </p:clrMapOvr>
+</p:sld>
+</file>
+
+<file path=ppt/slides/slide11.xml><?xml version="1.0" encoding="utf-8"?>
+<p:sld xmlns:a="http://schemas.openxmlformats.org/drawingml/2006/main" xmlns:r="http://schemas.openxmlformats.org/officeDocument/2006/relationships" xmlns:p="http://schemas.openxmlformats.org/presentationml/2006/main">
+  <p:cSld>
+    <p:spTree>
+      <p:nvGrpSpPr>
+        <p:cNvPr id="1" name=""/>
+        <p:cNvGrpSpPr/>
+        <p:nvPr/>
+      </p:nvGrpSpPr>
+      <p:grpSpPr>
+        <a:xfrm>
+          <a:off x="0" y="0"/>
+          <a:ext cx="0" cy="0"/>
+          <a:chOff x="0" y="0"/>
+          <a:chExt cx="0" cy="0"/>
+        </a:xfrm>
+      </p:grpSpPr>
+      <p:sp>
+        <p:nvSpPr>
+          <p:cNvPr id="4" name="テキスト ボックス 3">
+            <a:extLst>
+              <a:ext uri="{FF2B5EF4-FFF2-40B4-BE49-F238E27FC236}">
+                <a16:creationId xmlns:a16="http://schemas.microsoft.com/office/drawing/2014/main" id="{5A13BF46-B8C5-48AA-8308-C9ECFF431A18}"/>
+              </a:ext>
+            </a:extLst>
+          </p:cNvPr>
+          <p:cNvSpPr txBox="1"/>
+          <p:nvPr/>
+        </p:nvSpPr>
+        <p:spPr>
+          <a:xfrm>
+            <a:off x="567542" y="491954"/>
+            <a:ext cx="2646878" cy="584775"/>
+          </a:xfrm>
+          <a:prstGeom prst="rect">
+            <a:avLst/>
+          </a:prstGeom>
+          <a:noFill/>
+        </p:spPr>
+        <p:txBody>
+          <a:bodyPr wrap="none" rtlCol="0">
+            <a:spAutoFit/>
+          </a:bodyPr>
+          <a:lstStyle/>
+          <a:p>
+            <a:r>
+              <a:rPr kumimoji="1" lang="ja-JP" altLang="en-US" sz="3200" b="1" u="sng" dirty="0"/>
+              <a:t>アウトライン</a:t>
+            </a:r>
+            <a:endParaRPr kumimoji="1" lang="en-US" altLang="ja-JP" sz="3200" b="1" u="sng" dirty="0"/>
+          </a:p>
+        </p:txBody>
+      </p:sp>
+      <p:sp>
+        <p:nvSpPr>
+          <p:cNvPr id="6" name="テキスト ボックス 5">
+            <a:extLst>
+              <a:ext uri="{FF2B5EF4-FFF2-40B4-BE49-F238E27FC236}">
+                <a16:creationId xmlns:a16="http://schemas.microsoft.com/office/drawing/2014/main" id="{55830AD6-028B-4C4E-80BF-B70DFC1C3A46}"/>
+              </a:ext>
+            </a:extLst>
+          </p:cNvPr>
+          <p:cNvSpPr txBox="1"/>
+          <p:nvPr/>
+        </p:nvSpPr>
+        <p:spPr>
+          <a:xfrm>
+            <a:off x="567542" y="1216429"/>
+            <a:ext cx="5724644" cy="461665"/>
+          </a:xfrm>
+          <a:prstGeom prst="rect">
+            <a:avLst/>
+          </a:prstGeom>
+          <a:noFill/>
+        </p:spPr>
+        <p:txBody>
+          <a:bodyPr wrap="none" rtlCol="0">
+            <a:spAutoFit/>
+          </a:bodyPr>
+          <a:lstStyle/>
+          <a:p>
+            <a:r>
+              <a:rPr kumimoji="1" lang="ja-JP" altLang="en-US" sz="2400" dirty="0"/>
+              <a:t>マテリアルを追加して適用しましょう。</a:t>
+            </a:r>
+            <a:endParaRPr kumimoji="1" lang="en-US" altLang="ja-JP" sz="2400" dirty="0"/>
+          </a:p>
+        </p:txBody>
+      </p:sp>
+      <p:pic>
+        <p:nvPicPr>
+          <p:cNvPr id="5" name="図 4">
+            <a:extLst>
+              <a:ext uri="{FF2B5EF4-FFF2-40B4-BE49-F238E27FC236}">
+                <a16:creationId xmlns:a16="http://schemas.microsoft.com/office/drawing/2014/main" id="{6D99FF02-A91E-417D-BC09-8CED1AE2CAC3}"/>
+              </a:ext>
+            </a:extLst>
+          </p:cNvPr>
+          <p:cNvPicPr>
+            <a:picLocks noChangeAspect="1"/>
+          </p:cNvPicPr>
+          <p:nvPr/>
+        </p:nvPicPr>
+        <p:blipFill>
+          <a:blip r:embed="rId2"/>
+          <a:stretch>
+            <a:fillRect/>
+          </a:stretch>
+        </p:blipFill>
+        <p:spPr>
+          <a:xfrm>
+            <a:off x="568995" y="1817794"/>
+            <a:ext cx="5753903" cy="3810532"/>
+          </a:xfrm>
+          <a:prstGeom prst="rect">
+            <a:avLst/>
+          </a:prstGeom>
+        </p:spPr>
+      </p:pic>
+      <p:pic>
+        <p:nvPicPr>
+          <p:cNvPr id="8" name="図 7">
+            <a:extLst>
+              <a:ext uri="{FF2B5EF4-FFF2-40B4-BE49-F238E27FC236}">
+                <a16:creationId xmlns:a16="http://schemas.microsoft.com/office/drawing/2014/main" id="{7DCE5A89-2326-4929-A644-6457E979A7E4}"/>
               </a:ext>
             </a:extLst>
           </p:cNvPr>
@@ -3784,98 +4102,18 @@
         </p:blipFill>
         <p:spPr>
           <a:xfrm>
-            <a:off x="5050969" y="2556458"/>
-            <a:ext cx="5191850" cy="2572109"/>
+            <a:off x="6766153" y="1817794"/>
+            <a:ext cx="4914832" cy="2864273"/>
           </a:xfrm>
           <a:prstGeom prst="rect">
             <a:avLst/>
           </a:prstGeom>
         </p:spPr>
       </p:pic>
-      <p:sp>
-        <p:nvSpPr>
-          <p:cNvPr id="8" name="テキスト ボックス 7">
-            <a:extLst>
-              <a:ext uri="{FF2B5EF4-FFF2-40B4-BE49-F238E27FC236}">
-                <a16:creationId xmlns:a16="http://schemas.microsoft.com/office/drawing/2014/main" id="{BECAD3C9-C4DE-46A9-B20B-C3C9C9608A87}"/>
-              </a:ext>
-            </a:extLst>
-          </p:cNvPr>
-          <p:cNvSpPr txBox="1"/>
-          <p:nvPr/>
-        </p:nvSpPr>
-        <p:spPr>
-          <a:xfrm>
-            <a:off x="944909" y="5954059"/>
-            <a:ext cx="3570208" cy="461665"/>
-          </a:xfrm>
-          <a:prstGeom prst="rect">
-            <a:avLst/>
-          </a:prstGeom>
-          <a:noFill/>
-        </p:spPr>
-        <p:txBody>
-          <a:bodyPr wrap="none" rtlCol="0">
-            <a:spAutoFit/>
-          </a:bodyPr>
-          <a:lstStyle/>
-          <a:p>
-            <a:r>
-              <a:rPr kumimoji="1" lang="ja-JP" altLang="en-US" sz="2400" dirty="0"/>
-              <a:t>影の段階を増やしたい時</a:t>
-            </a:r>
-            <a:endParaRPr kumimoji="1" lang="en-US" altLang="ja-JP" sz="2400" dirty="0"/>
-          </a:p>
-        </p:txBody>
-      </p:sp>
-      <p:sp>
-        <p:nvSpPr>
-          <p:cNvPr id="9" name="テキスト ボックス 8">
-            <a:extLst>
-              <a:ext uri="{FF2B5EF4-FFF2-40B4-BE49-F238E27FC236}">
-                <a16:creationId xmlns:a16="http://schemas.microsoft.com/office/drawing/2014/main" id="{329BABEA-C7FD-4C55-AC50-77D42F2F3467}"/>
-              </a:ext>
-            </a:extLst>
-          </p:cNvPr>
-          <p:cNvSpPr txBox="1"/>
-          <p:nvPr/>
-        </p:nvSpPr>
-        <p:spPr>
-          <a:xfrm>
-            <a:off x="5332628" y="5954058"/>
-            <a:ext cx="5612434" cy="461665"/>
-          </a:xfrm>
-          <a:prstGeom prst="rect">
-            <a:avLst/>
-          </a:prstGeom>
-          <a:noFill/>
-        </p:spPr>
-        <p:txBody>
-          <a:bodyPr wrap="none" rtlCol="0">
-            <a:spAutoFit/>
-          </a:bodyPr>
-          <a:lstStyle/>
-          <a:p>
-            <a:r>
-              <a:rPr lang="en-US" altLang="ja-JP" sz="2400" dirty="0"/>
-              <a:t>i</a:t>
-            </a:r>
-            <a:r>
-              <a:rPr kumimoji="1" lang="en-US" altLang="ja-JP" sz="2400" dirty="0"/>
-              <a:t>f</a:t>
-            </a:r>
-            <a:r>
-              <a:rPr kumimoji="1" lang="ja-JP" altLang="en-US" sz="2400" dirty="0"/>
-              <a:t>文をいい感じに増やさないといけない</a:t>
-            </a:r>
-            <a:endParaRPr kumimoji="1" lang="en-US" altLang="ja-JP" sz="2400" dirty="0"/>
-          </a:p>
-        </p:txBody>
-      </p:sp>
     </p:spTree>
     <p:extLst>
       <p:ext uri="{BB962C8B-B14F-4D97-AF65-F5344CB8AC3E}">
-        <p14:creationId xmlns:p14="http://schemas.microsoft.com/office/powerpoint/2010/main" val="38792862"/>
+        <p14:creationId xmlns:p14="http://schemas.microsoft.com/office/powerpoint/2010/main" val="14858751"/>
       </p:ext>
     </p:extLst>
   </p:cSld>
@@ -3917,7 +4155,7 @@
         <p:spPr>
           <a:xfrm>
             <a:off x="567542" y="491954"/>
-            <a:ext cx="3877985" cy="584775"/>
+            <a:ext cx="2646878" cy="584775"/>
           </a:xfrm>
           <a:prstGeom prst="rect">
             <a:avLst/>
@@ -3932,7 +4170,7 @@
           <a:p>
             <a:r>
               <a:rPr kumimoji="1" lang="ja-JP" altLang="en-US" sz="3200" b="1" u="sng" dirty="0"/>
-              <a:t>トゥーンシェーダー</a:t>
+              <a:t>アウトライン</a:t>
             </a:r>
             <a:endParaRPr kumimoji="1" lang="en-US" altLang="ja-JP" sz="3200" b="1" u="sng" dirty="0"/>
           </a:p>
@@ -3953,7 +4191,7 @@
         <p:spPr>
           <a:xfrm>
             <a:off x="567542" y="1216429"/>
-            <a:ext cx="7500771" cy="1938992"/>
+            <a:ext cx="9725739" cy="1200329"/>
           </a:xfrm>
           <a:prstGeom prst="rect">
             <a:avLst/>
@@ -3967,99 +4205,1049 @@
           <a:lstStyle/>
           <a:p>
             <a:r>
-              <a:rPr lang="ja-JP" altLang="en-US" sz="2400" dirty="0"/>
-              <a:t>この問題は</a:t>
-            </a:r>
-            <a:r>
-              <a:rPr lang="en-US" altLang="ja-JP" sz="2400" b="1" dirty="0">
+              <a:rPr kumimoji="1" lang="ja-JP" altLang="en-US" sz="2400" dirty="0"/>
+              <a:t>これまでシェーダーのプログラムは</a:t>
+            </a:r>
+            <a:r>
+              <a:rPr kumimoji="1" lang="en-US" altLang="ja-JP" sz="2400" b="1" dirty="0">
                 <a:solidFill>
                   <a:srgbClr val="FF0000"/>
                 </a:solidFill>
               </a:rPr>
-              <a:t>Ramp</a:t>
-            </a:r>
+              <a:t>Pass</a:t>
+            </a:r>
+            <a:r>
+              <a:rPr kumimoji="1" lang="ja-JP" altLang="en-US" sz="2400" b="1" dirty="0">
+                <a:solidFill>
+                  <a:srgbClr val="FF0000"/>
+                </a:solidFill>
+              </a:rPr>
+              <a:t>ブロック</a:t>
+            </a:r>
+            <a:r>
+              <a:rPr kumimoji="1" lang="ja-JP" altLang="en-US" sz="2400" dirty="0"/>
+              <a:t>に書きました。</a:t>
+            </a:r>
+            <a:endParaRPr kumimoji="1" lang="en-US" altLang="ja-JP" sz="2400" dirty="0"/>
+          </a:p>
+          <a:p>
+            <a:r>
+              <a:rPr lang="ja-JP" altLang="en-US" sz="2400" dirty="0"/>
+              <a:t>つまり</a:t>
+            </a:r>
+            <a:r>
+              <a:rPr lang="en-US" altLang="ja-JP" sz="2400" dirty="0"/>
+              <a:t>Pass</a:t>
+            </a:r>
+            <a:r>
+              <a:rPr lang="ja-JP" altLang="en-US" sz="2400" dirty="0"/>
+              <a:t>ブロックが複数あれば、</a:t>
+            </a:r>
+            <a:endParaRPr lang="en-US" altLang="ja-JP" sz="2400" dirty="0"/>
+          </a:p>
+          <a:p>
+            <a:r>
+              <a:rPr kumimoji="1" lang="ja-JP" altLang="en-US" sz="2400" b="1" dirty="0">
+                <a:solidFill>
+                  <a:srgbClr val="FF0000"/>
+                </a:solidFill>
+              </a:rPr>
+              <a:t>複数の描画処理を１つのシェーダーファイルに書くことができます。</a:t>
+            </a:r>
+            <a:endParaRPr kumimoji="1" lang="en-US" altLang="ja-JP" sz="2400" b="1" dirty="0">
+              <a:solidFill>
+                <a:srgbClr val="FF0000"/>
+              </a:solidFill>
+            </a:endParaRPr>
+          </a:p>
+        </p:txBody>
+      </p:sp>
+      <p:pic>
+        <p:nvPicPr>
+          <p:cNvPr id="3" name="図 2">
+            <a:extLst>
+              <a:ext uri="{FF2B5EF4-FFF2-40B4-BE49-F238E27FC236}">
+                <a16:creationId xmlns:a16="http://schemas.microsoft.com/office/drawing/2014/main" id="{5F5DD3DD-C7EE-46DE-B128-26A649029F65}"/>
+              </a:ext>
+            </a:extLst>
+          </p:cNvPr>
+          <p:cNvPicPr>
+            <a:picLocks noChangeAspect="1"/>
+          </p:cNvPicPr>
+          <p:nvPr/>
+        </p:nvPicPr>
+        <p:blipFill>
+          <a:blip r:embed="rId2"/>
+          <a:stretch>
+            <a:fillRect/>
+          </a:stretch>
+        </p:blipFill>
+        <p:spPr>
+          <a:xfrm>
+            <a:off x="567542" y="2556458"/>
+            <a:ext cx="4138422" cy="3937475"/>
+          </a:xfrm>
+          <a:prstGeom prst="rect">
+            <a:avLst/>
+          </a:prstGeom>
+        </p:spPr>
+      </p:pic>
+    </p:spTree>
+    <p:extLst>
+      <p:ext uri="{BB962C8B-B14F-4D97-AF65-F5344CB8AC3E}">
+        <p14:creationId xmlns:p14="http://schemas.microsoft.com/office/powerpoint/2010/main" val="1607137365"/>
+      </p:ext>
+    </p:extLst>
+  </p:cSld>
+  <p:clrMapOvr>
+    <a:masterClrMapping/>
+  </p:clrMapOvr>
+</p:sld>
+</file>
+
+<file path=ppt/slides/slide3.xml><?xml version="1.0" encoding="utf-8"?>
+<p:sld xmlns:a="http://schemas.openxmlformats.org/drawingml/2006/main" xmlns:r="http://schemas.openxmlformats.org/officeDocument/2006/relationships" xmlns:p="http://schemas.openxmlformats.org/presentationml/2006/main">
+  <p:cSld>
+    <p:spTree>
+      <p:nvGrpSpPr>
+        <p:cNvPr id="1" name=""/>
+        <p:cNvGrpSpPr/>
+        <p:nvPr/>
+      </p:nvGrpSpPr>
+      <p:grpSpPr>
+        <a:xfrm>
+          <a:off x="0" y="0"/>
+          <a:ext cx="0" cy="0"/>
+          <a:chOff x="0" y="0"/>
+          <a:chExt cx="0" cy="0"/>
+        </a:xfrm>
+      </p:grpSpPr>
+      <p:sp>
+        <p:nvSpPr>
+          <p:cNvPr id="4" name="テキスト ボックス 3">
+            <a:extLst>
+              <a:ext uri="{FF2B5EF4-FFF2-40B4-BE49-F238E27FC236}">
+                <a16:creationId xmlns:a16="http://schemas.microsoft.com/office/drawing/2014/main" id="{5A13BF46-B8C5-48AA-8308-C9ECFF431A18}"/>
+              </a:ext>
+            </a:extLst>
+          </p:cNvPr>
+          <p:cNvSpPr txBox="1"/>
+          <p:nvPr/>
+        </p:nvSpPr>
+        <p:spPr>
+          <a:xfrm>
+            <a:off x="567542" y="491954"/>
+            <a:ext cx="2646878" cy="584775"/>
+          </a:xfrm>
+          <a:prstGeom prst="rect">
+            <a:avLst/>
+          </a:prstGeom>
+          <a:noFill/>
+        </p:spPr>
+        <p:txBody>
+          <a:bodyPr wrap="none" rtlCol="0">
+            <a:spAutoFit/>
+          </a:bodyPr>
+          <a:lstStyle/>
+          <a:p>
+            <a:r>
+              <a:rPr kumimoji="1" lang="ja-JP" altLang="en-US" sz="3200" b="1" u="sng" dirty="0"/>
+              <a:t>アウトライン</a:t>
+            </a:r>
+            <a:endParaRPr kumimoji="1" lang="en-US" altLang="ja-JP" sz="3200" b="1" u="sng" dirty="0"/>
+          </a:p>
+        </p:txBody>
+      </p:sp>
+      <p:sp>
+        <p:nvSpPr>
+          <p:cNvPr id="6" name="テキスト ボックス 5">
+            <a:extLst>
+              <a:ext uri="{FF2B5EF4-FFF2-40B4-BE49-F238E27FC236}">
+                <a16:creationId xmlns:a16="http://schemas.microsoft.com/office/drawing/2014/main" id="{55830AD6-028B-4C4E-80BF-B70DFC1C3A46}"/>
+              </a:ext>
+            </a:extLst>
+          </p:cNvPr>
+          <p:cNvSpPr txBox="1"/>
+          <p:nvPr/>
+        </p:nvSpPr>
+        <p:spPr>
+          <a:xfrm>
+            <a:off x="567542" y="1216429"/>
+            <a:ext cx="5464958" cy="461665"/>
+          </a:xfrm>
+          <a:prstGeom prst="rect">
+            <a:avLst/>
+          </a:prstGeom>
+          <a:noFill/>
+        </p:spPr>
+        <p:txBody>
+          <a:bodyPr wrap="none" rtlCol="0">
+            <a:spAutoFit/>
+          </a:bodyPr>
+          <a:lstStyle/>
+          <a:p>
+            <a:r>
+              <a:rPr kumimoji="1" lang="en-US" altLang="ja-JP" sz="2400" b="1" dirty="0" err="1">
+                <a:solidFill>
+                  <a:srgbClr val="FF0000"/>
+                </a:solidFill>
+              </a:rPr>
+              <a:t>Outline.shader</a:t>
+            </a:r>
+            <a:r>
+              <a:rPr kumimoji="1" lang="ja-JP" altLang="en-US" sz="2400" dirty="0"/>
+              <a:t>を追加して書きます。</a:t>
+            </a:r>
+            <a:endParaRPr kumimoji="1" lang="en-US" altLang="ja-JP" sz="2400" dirty="0"/>
+          </a:p>
+        </p:txBody>
+      </p:sp>
+      <p:pic>
+        <p:nvPicPr>
+          <p:cNvPr id="5" name="図 4">
+            <a:extLst>
+              <a:ext uri="{FF2B5EF4-FFF2-40B4-BE49-F238E27FC236}">
+                <a16:creationId xmlns:a16="http://schemas.microsoft.com/office/drawing/2014/main" id="{C3507CF8-48B1-4C24-91B2-06FF62731C8F}"/>
+              </a:ext>
+            </a:extLst>
+          </p:cNvPr>
+          <p:cNvPicPr>
+            <a:picLocks noChangeAspect="1"/>
+          </p:cNvPicPr>
+          <p:nvPr/>
+        </p:nvPicPr>
+        <p:blipFill>
+          <a:blip r:embed="rId2"/>
+          <a:stretch>
+            <a:fillRect/>
+          </a:stretch>
+        </p:blipFill>
+        <p:spPr>
+          <a:xfrm>
+            <a:off x="567542" y="1817794"/>
+            <a:ext cx="8034591" cy="4554295"/>
+          </a:xfrm>
+          <a:prstGeom prst="rect">
+            <a:avLst/>
+          </a:prstGeom>
+        </p:spPr>
+      </p:pic>
+    </p:spTree>
+    <p:extLst>
+      <p:ext uri="{BB962C8B-B14F-4D97-AF65-F5344CB8AC3E}">
+        <p14:creationId xmlns:p14="http://schemas.microsoft.com/office/powerpoint/2010/main" val="1194952287"/>
+      </p:ext>
+    </p:extLst>
+  </p:cSld>
+  <p:clrMapOvr>
+    <a:masterClrMapping/>
+  </p:clrMapOvr>
+</p:sld>
+</file>
+
+<file path=ppt/slides/slide4.xml><?xml version="1.0" encoding="utf-8"?>
+<p:sld xmlns:a="http://schemas.openxmlformats.org/drawingml/2006/main" xmlns:r="http://schemas.openxmlformats.org/officeDocument/2006/relationships" xmlns:p="http://schemas.openxmlformats.org/presentationml/2006/main">
+  <p:cSld>
+    <p:spTree>
+      <p:nvGrpSpPr>
+        <p:cNvPr id="1" name=""/>
+        <p:cNvGrpSpPr/>
+        <p:nvPr/>
+      </p:nvGrpSpPr>
+      <p:grpSpPr>
+        <a:xfrm>
+          <a:off x="0" y="0"/>
+          <a:ext cx="0" cy="0"/>
+          <a:chOff x="0" y="0"/>
+          <a:chExt cx="0" cy="0"/>
+        </a:xfrm>
+      </p:grpSpPr>
+      <p:sp>
+        <p:nvSpPr>
+          <p:cNvPr id="4" name="テキスト ボックス 3">
+            <a:extLst>
+              <a:ext uri="{FF2B5EF4-FFF2-40B4-BE49-F238E27FC236}">
+                <a16:creationId xmlns:a16="http://schemas.microsoft.com/office/drawing/2014/main" id="{5A13BF46-B8C5-48AA-8308-C9ECFF431A18}"/>
+              </a:ext>
+            </a:extLst>
+          </p:cNvPr>
+          <p:cNvSpPr txBox="1"/>
+          <p:nvPr/>
+        </p:nvSpPr>
+        <p:spPr>
+          <a:xfrm>
+            <a:off x="567542" y="491954"/>
+            <a:ext cx="2646878" cy="584775"/>
+          </a:xfrm>
+          <a:prstGeom prst="rect">
+            <a:avLst/>
+          </a:prstGeom>
+          <a:noFill/>
+        </p:spPr>
+        <p:txBody>
+          <a:bodyPr wrap="none" rtlCol="0">
+            <a:spAutoFit/>
+          </a:bodyPr>
+          <a:lstStyle/>
+          <a:p>
+            <a:r>
+              <a:rPr kumimoji="1" lang="ja-JP" altLang="en-US" sz="3200" b="1" u="sng" dirty="0"/>
+              <a:t>アウトライン</a:t>
+            </a:r>
+            <a:endParaRPr kumimoji="1" lang="en-US" altLang="ja-JP" sz="3200" b="1" u="sng" dirty="0"/>
+          </a:p>
+        </p:txBody>
+      </p:sp>
+      <p:sp>
+        <p:nvSpPr>
+          <p:cNvPr id="6" name="テキスト ボックス 5">
+            <a:extLst>
+              <a:ext uri="{FF2B5EF4-FFF2-40B4-BE49-F238E27FC236}">
+                <a16:creationId xmlns:a16="http://schemas.microsoft.com/office/drawing/2014/main" id="{55830AD6-028B-4C4E-80BF-B70DFC1C3A46}"/>
+              </a:ext>
+            </a:extLst>
+          </p:cNvPr>
+          <p:cNvSpPr txBox="1"/>
+          <p:nvPr/>
+        </p:nvSpPr>
+        <p:spPr>
+          <a:xfrm>
+            <a:off x="567542" y="1216429"/>
+            <a:ext cx="3926075" cy="461665"/>
+          </a:xfrm>
+          <a:prstGeom prst="rect">
+            <a:avLst/>
+          </a:prstGeom>
+          <a:noFill/>
+        </p:spPr>
+        <p:txBody>
+          <a:bodyPr wrap="none" rtlCol="0">
+            <a:spAutoFit/>
+          </a:bodyPr>
+          <a:lstStyle/>
+          <a:p>
+            <a:r>
+              <a:rPr kumimoji="1" lang="en-US" altLang="ja-JP" sz="2400" b="1" dirty="0" err="1">
+                <a:solidFill>
+                  <a:srgbClr val="FF0000"/>
+                </a:solidFill>
+              </a:rPr>
+              <a:t>Outline.shader</a:t>
+            </a:r>
+            <a:r>
+              <a:rPr kumimoji="1" lang="ja-JP" altLang="en-US" sz="2400" dirty="0"/>
+              <a:t>（その２）</a:t>
+            </a:r>
+            <a:endParaRPr kumimoji="1" lang="en-US" altLang="ja-JP" sz="2400" dirty="0"/>
+          </a:p>
+        </p:txBody>
+      </p:sp>
+      <p:pic>
+        <p:nvPicPr>
+          <p:cNvPr id="3" name="図 2">
+            <a:extLst>
+              <a:ext uri="{FF2B5EF4-FFF2-40B4-BE49-F238E27FC236}">
+                <a16:creationId xmlns:a16="http://schemas.microsoft.com/office/drawing/2014/main" id="{979D87F9-0D5E-473B-A890-871D4F1E2AB9}"/>
+              </a:ext>
+            </a:extLst>
+          </p:cNvPr>
+          <p:cNvPicPr>
+            <a:picLocks noChangeAspect="1"/>
+          </p:cNvPicPr>
+          <p:nvPr/>
+        </p:nvPicPr>
+        <p:blipFill>
+          <a:blip r:embed="rId2"/>
+          <a:stretch>
+            <a:fillRect/>
+          </a:stretch>
+        </p:blipFill>
+        <p:spPr>
+          <a:xfrm>
+            <a:off x="567542" y="1817795"/>
+            <a:ext cx="6527525" cy="4569950"/>
+          </a:xfrm>
+          <a:prstGeom prst="rect">
+            <a:avLst/>
+          </a:prstGeom>
+        </p:spPr>
+      </p:pic>
+    </p:spTree>
+    <p:extLst>
+      <p:ext uri="{BB962C8B-B14F-4D97-AF65-F5344CB8AC3E}">
+        <p14:creationId xmlns:p14="http://schemas.microsoft.com/office/powerpoint/2010/main" val="1547719596"/>
+      </p:ext>
+    </p:extLst>
+  </p:cSld>
+  <p:clrMapOvr>
+    <a:masterClrMapping/>
+  </p:clrMapOvr>
+</p:sld>
+</file>
+
+<file path=ppt/slides/slide5.xml><?xml version="1.0" encoding="utf-8"?>
+<p:sld xmlns:a="http://schemas.openxmlformats.org/drawingml/2006/main" xmlns:r="http://schemas.openxmlformats.org/officeDocument/2006/relationships" xmlns:p="http://schemas.openxmlformats.org/presentationml/2006/main">
+  <p:cSld>
+    <p:spTree>
+      <p:nvGrpSpPr>
+        <p:cNvPr id="1" name=""/>
+        <p:cNvGrpSpPr/>
+        <p:nvPr/>
+      </p:nvGrpSpPr>
+      <p:grpSpPr>
+        <a:xfrm>
+          <a:off x="0" y="0"/>
+          <a:ext cx="0" cy="0"/>
+          <a:chOff x="0" y="0"/>
+          <a:chExt cx="0" cy="0"/>
+        </a:xfrm>
+      </p:grpSpPr>
+      <p:sp>
+        <p:nvSpPr>
+          <p:cNvPr id="4" name="テキスト ボックス 3">
+            <a:extLst>
+              <a:ext uri="{FF2B5EF4-FFF2-40B4-BE49-F238E27FC236}">
+                <a16:creationId xmlns:a16="http://schemas.microsoft.com/office/drawing/2014/main" id="{5A13BF46-B8C5-48AA-8308-C9ECFF431A18}"/>
+              </a:ext>
+            </a:extLst>
+          </p:cNvPr>
+          <p:cNvSpPr txBox="1"/>
+          <p:nvPr/>
+        </p:nvSpPr>
+        <p:spPr>
+          <a:xfrm>
+            <a:off x="567542" y="491954"/>
+            <a:ext cx="2646878" cy="584775"/>
+          </a:xfrm>
+          <a:prstGeom prst="rect">
+            <a:avLst/>
+          </a:prstGeom>
+          <a:noFill/>
+        </p:spPr>
+        <p:txBody>
+          <a:bodyPr wrap="none" rtlCol="0">
+            <a:spAutoFit/>
+          </a:bodyPr>
+          <a:lstStyle/>
+          <a:p>
+            <a:r>
+              <a:rPr kumimoji="1" lang="ja-JP" altLang="en-US" sz="3200" b="1" u="sng" dirty="0"/>
+              <a:t>アウトライン</a:t>
+            </a:r>
+            <a:endParaRPr kumimoji="1" lang="en-US" altLang="ja-JP" sz="3200" b="1" u="sng" dirty="0"/>
+          </a:p>
+        </p:txBody>
+      </p:sp>
+      <p:sp>
+        <p:nvSpPr>
+          <p:cNvPr id="6" name="テキスト ボックス 5">
+            <a:extLst>
+              <a:ext uri="{FF2B5EF4-FFF2-40B4-BE49-F238E27FC236}">
+                <a16:creationId xmlns:a16="http://schemas.microsoft.com/office/drawing/2014/main" id="{55830AD6-028B-4C4E-80BF-B70DFC1C3A46}"/>
+              </a:ext>
+            </a:extLst>
+          </p:cNvPr>
+          <p:cNvSpPr txBox="1"/>
+          <p:nvPr/>
+        </p:nvSpPr>
+        <p:spPr>
+          <a:xfrm>
+            <a:off x="567542" y="1216429"/>
+            <a:ext cx="7617791" cy="461665"/>
+          </a:xfrm>
+          <a:prstGeom prst="rect">
+            <a:avLst/>
+          </a:prstGeom>
+          <a:noFill/>
+        </p:spPr>
+        <p:txBody>
+          <a:bodyPr wrap="none" rtlCol="0">
+            <a:spAutoFit/>
+          </a:bodyPr>
+          <a:lstStyle/>
+          <a:p>
+            <a:r>
+              <a:rPr kumimoji="1" lang="en-US" altLang="ja-JP" sz="2400" b="1" dirty="0" err="1">
+                <a:solidFill>
+                  <a:srgbClr val="FF0000"/>
+                </a:solidFill>
+              </a:rPr>
+              <a:t>Outline.shader</a:t>
+            </a:r>
+            <a:r>
+              <a:rPr kumimoji="1" lang="ja-JP" altLang="en-US" sz="2400" dirty="0"/>
+              <a:t>（その３）</a:t>
+            </a:r>
+            <a:r>
+              <a:rPr kumimoji="1" lang="en-US" altLang="ja-JP" sz="2400" dirty="0"/>
+              <a:t>※</a:t>
+            </a:r>
+            <a:r>
+              <a:rPr kumimoji="1" lang="ja-JP" altLang="en-US" sz="2400" dirty="0"/>
+              <a:t>前回の</a:t>
+            </a:r>
+            <a:r>
+              <a:rPr kumimoji="1" lang="en-US" altLang="ja-JP" sz="2400" dirty="0" err="1"/>
+              <a:t>RampToon</a:t>
+            </a:r>
+            <a:r>
+              <a:rPr kumimoji="1" lang="ja-JP" altLang="en-US" sz="2400" dirty="0"/>
+              <a:t>と一緒</a:t>
+            </a:r>
+            <a:endParaRPr kumimoji="1" lang="en-US" altLang="ja-JP" sz="2400" dirty="0"/>
+          </a:p>
+        </p:txBody>
+      </p:sp>
+      <p:pic>
+        <p:nvPicPr>
+          <p:cNvPr id="3" name="図 2">
+            <a:extLst>
+              <a:ext uri="{FF2B5EF4-FFF2-40B4-BE49-F238E27FC236}">
+                <a16:creationId xmlns:a16="http://schemas.microsoft.com/office/drawing/2014/main" id="{B7BC927F-07A5-421D-8627-64D7DCDABA10}"/>
+              </a:ext>
+            </a:extLst>
+          </p:cNvPr>
+          <p:cNvPicPr>
+            <a:picLocks noChangeAspect="1"/>
+          </p:cNvPicPr>
+          <p:nvPr/>
+        </p:nvPicPr>
+        <p:blipFill>
+          <a:blip r:embed="rId2"/>
+          <a:stretch>
+            <a:fillRect/>
+          </a:stretch>
+        </p:blipFill>
+        <p:spPr>
+          <a:xfrm>
+            <a:off x="567542" y="1817795"/>
+            <a:ext cx="7069391" cy="4693552"/>
+          </a:xfrm>
+          <a:prstGeom prst="rect">
+            <a:avLst/>
+          </a:prstGeom>
+        </p:spPr>
+      </p:pic>
+    </p:spTree>
+    <p:extLst>
+      <p:ext uri="{BB962C8B-B14F-4D97-AF65-F5344CB8AC3E}">
+        <p14:creationId xmlns:p14="http://schemas.microsoft.com/office/powerpoint/2010/main" val="1841671971"/>
+      </p:ext>
+    </p:extLst>
+  </p:cSld>
+  <p:clrMapOvr>
+    <a:masterClrMapping/>
+  </p:clrMapOvr>
+</p:sld>
+</file>
+
+<file path=ppt/slides/slide6.xml><?xml version="1.0" encoding="utf-8"?>
+<p:sld xmlns:a="http://schemas.openxmlformats.org/drawingml/2006/main" xmlns:r="http://schemas.openxmlformats.org/officeDocument/2006/relationships" xmlns:p="http://schemas.openxmlformats.org/presentationml/2006/main">
+  <p:cSld>
+    <p:spTree>
+      <p:nvGrpSpPr>
+        <p:cNvPr id="1" name=""/>
+        <p:cNvGrpSpPr/>
+        <p:nvPr/>
+      </p:nvGrpSpPr>
+      <p:grpSpPr>
+        <a:xfrm>
+          <a:off x="0" y="0"/>
+          <a:ext cx="0" cy="0"/>
+          <a:chOff x="0" y="0"/>
+          <a:chExt cx="0" cy="0"/>
+        </a:xfrm>
+      </p:grpSpPr>
+      <p:sp>
+        <p:nvSpPr>
+          <p:cNvPr id="4" name="テキスト ボックス 3">
+            <a:extLst>
+              <a:ext uri="{FF2B5EF4-FFF2-40B4-BE49-F238E27FC236}">
+                <a16:creationId xmlns:a16="http://schemas.microsoft.com/office/drawing/2014/main" id="{5A13BF46-B8C5-48AA-8308-C9ECFF431A18}"/>
+              </a:ext>
+            </a:extLst>
+          </p:cNvPr>
+          <p:cNvSpPr txBox="1"/>
+          <p:nvPr/>
+        </p:nvSpPr>
+        <p:spPr>
+          <a:xfrm>
+            <a:off x="567542" y="491954"/>
+            <a:ext cx="2646878" cy="584775"/>
+          </a:xfrm>
+          <a:prstGeom prst="rect">
+            <a:avLst/>
+          </a:prstGeom>
+          <a:noFill/>
+        </p:spPr>
+        <p:txBody>
+          <a:bodyPr wrap="none" rtlCol="0">
+            <a:spAutoFit/>
+          </a:bodyPr>
+          <a:lstStyle/>
+          <a:p>
+            <a:r>
+              <a:rPr kumimoji="1" lang="ja-JP" altLang="en-US" sz="3200" b="1" u="sng" dirty="0"/>
+              <a:t>アウトライン</a:t>
+            </a:r>
+            <a:endParaRPr kumimoji="1" lang="en-US" altLang="ja-JP" sz="3200" b="1" u="sng" dirty="0"/>
+          </a:p>
+        </p:txBody>
+      </p:sp>
+      <p:sp>
+        <p:nvSpPr>
+          <p:cNvPr id="6" name="テキスト ボックス 5">
+            <a:extLst>
+              <a:ext uri="{FF2B5EF4-FFF2-40B4-BE49-F238E27FC236}">
+                <a16:creationId xmlns:a16="http://schemas.microsoft.com/office/drawing/2014/main" id="{55830AD6-028B-4C4E-80BF-B70DFC1C3A46}"/>
+              </a:ext>
+            </a:extLst>
+          </p:cNvPr>
+          <p:cNvSpPr txBox="1"/>
+          <p:nvPr/>
+        </p:nvSpPr>
+        <p:spPr>
+          <a:xfrm>
+            <a:off x="567542" y="1216429"/>
+            <a:ext cx="7705956" cy="461665"/>
+          </a:xfrm>
+          <a:prstGeom prst="rect">
+            <a:avLst/>
+          </a:prstGeom>
+          <a:noFill/>
+        </p:spPr>
+        <p:txBody>
+          <a:bodyPr wrap="none" rtlCol="0">
+            <a:spAutoFit/>
+          </a:bodyPr>
+          <a:lstStyle/>
+          <a:p>
+            <a:r>
+              <a:rPr kumimoji="1" lang="en-US" altLang="ja-JP" sz="2400" b="1" dirty="0" err="1">
+                <a:solidFill>
+                  <a:srgbClr val="FF0000"/>
+                </a:solidFill>
+              </a:rPr>
+              <a:t>Outline.shader</a:t>
+            </a:r>
+            <a:r>
+              <a:rPr kumimoji="1" lang="ja-JP" altLang="en-US" sz="2400" dirty="0"/>
+              <a:t>（その４）</a:t>
+            </a:r>
+            <a:r>
+              <a:rPr kumimoji="1" lang="en-US" altLang="ja-JP" sz="2400" dirty="0"/>
+              <a:t> ※</a:t>
+            </a:r>
+            <a:r>
+              <a:rPr kumimoji="1" lang="ja-JP" altLang="en-US" sz="2400" dirty="0"/>
+              <a:t>前回の</a:t>
+            </a:r>
+            <a:r>
+              <a:rPr kumimoji="1" lang="en-US" altLang="ja-JP" sz="2400" dirty="0" err="1"/>
+              <a:t>RampToon</a:t>
+            </a:r>
+            <a:r>
+              <a:rPr kumimoji="1" lang="ja-JP" altLang="en-US" sz="2400" dirty="0"/>
+              <a:t>と一緒</a:t>
+            </a:r>
+            <a:endParaRPr kumimoji="1" lang="en-US" altLang="ja-JP" sz="2400" dirty="0"/>
+          </a:p>
+        </p:txBody>
+      </p:sp>
+      <p:pic>
+        <p:nvPicPr>
+          <p:cNvPr id="5" name="図 4">
+            <a:extLst>
+              <a:ext uri="{FF2B5EF4-FFF2-40B4-BE49-F238E27FC236}">
+                <a16:creationId xmlns:a16="http://schemas.microsoft.com/office/drawing/2014/main" id="{2C3965B4-017E-4B2A-A860-3B2D9C476446}"/>
+              </a:ext>
+            </a:extLst>
+          </p:cNvPr>
+          <p:cNvPicPr>
+            <a:picLocks noChangeAspect="1"/>
+          </p:cNvPicPr>
+          <p:nvPr/>
+        </p:nvPicPr>
+        <p:blipFill>
+          <a:blip r:embed="rId2"/>
+          <a:stretch>
+            <a:fillRect/>
+          </a:stretch>
+        </p:blipFill>
+        <p:spPr>
+          <a:xfrm>
+            <a:off x="567542" y="1817794"/>
+            <a:ext cx="8322458" cy="4586247"/>
+          </a:xfrm>
+          <a:prstGeom prst="rect">
+            <a:avLst/>
+          </a:prstGeom>
+        </p:spPr>
+      </p:pic>
+    </p:spTree>
+    <p:extLst>
+      <p:ext uri="{BB962C8B-B14F-4D97-AF65-F5344CB8AC3E}">
+        <p14:creationId xmlns:p14="http://schemas.microsoft.com/office/powerpoint/2010/main" val="503710597"/>
+      </p:ext>
+    </p:extLst>
+  </p:cSld>
+  <p:clrMapOvr>
+    <a:masterClrMapping/>
+  </p:clrMapOvr>
+</p:sld>
+</file>
+
+<file path=ppt/slides/slide7.xml><?xml version="1.0" encoding="utf-8"?>
+<p:sld xmlns:a="http://schemas.openxmlformats.org/drawingml/2006/main" xmlns:r="http://schemas.openxmlformats.org/officeDocument/2006/relationships" xmlns:p="http://schemas.openxmlformats.org/presentationml/2006/main">
+  <p:cSld>
+    <p:spTree>
+      <p:nvGrpSpPr>
+        <p:cNvPr id="1" name=""/>
+        <p:cNvGrpSpPr/>
+        <p:nvPr/>
+      </p:nvGrpSpPr>
+      <p:grpSpPr>
+        <a:xfrm>
+          <a:off x="0" y="0"/>
+          <a:ext cx="0" cy="0"/>
+          <a:chOff x="0" y="0"/>
+          <a:chExt cx="0" cy="0"/>
+        </a:xfrm>
+      </p:grpSpPr>
+      <p:sp>
+        <p:nvSpPr>
+          <p:cNvPr id="4" name="テキスト ボックス 3">
+            <a:extLst>
+              <a:ext uri="{FF2B5EF4-FFF2-40B4-BE49-F238E27FC236}">
+                <a16:creationId xmlns:a16="http://schemas.microsoft.com/office/drawing/2014/main" id="{5A13BF46-B8C5-48AA-8308-C9ECFF431A18}"/>
+              </a:ext>
+            </a:extLst>
+          </p:cNvPr>
+          <p:cNvSpPr txBox="1"/>
+          <p:nvPr/>
+        </p:nvSpPr>
+        <p:spPr>
+          <a:xfrm>
+            <a:off x="567542" y="491954"/>
+            <a:ext cx="2646878" cy="584775"/>
+          </a:xfrm>
+          <a:prstGeom prst="rect">
+            <a:avLst/>
+          </a:prstGeom>
+          <a:noFill/>
+        </p:spPr>
+        <p:txBody>
+          <a:bodyPr wrap="none" rtlCol="0">
+            <a:spAutoFit/>
+          </a:bodyPr>
+          <a:lstStyle/>
+          <a:p>
+            <a:r>
+              <a:rPr kumimoji="1" lang="ja-JP" altLang="en-US" sz="3200" b="1" u="sng" dirty="0"/>
+              <a:t>アウトライン</a:t>
+            </a:r>
+            <a:endParaRPr kumimoji="1" lang="en-US" altLang="ja-JP" sz="3200" b="1" u="sng" dirty="0"/>
+          </a:p>
+        </p:txBody>
+      </p:sp>
+      <p:sp>
+        <p:nvSpPr>
+          <p:cNvPr id="6" name="テキスト ボックス 5">
+            <a:extLst>
+              <a:ext uri="{FF2B5EF4-FFF2-40B4-BE49-F238E27FC236}">
+                <a16:creationId xmlns:a16="http://schemas.microsoft.com/office/drawing/2014/main" id="{55830AD6-028B-4C4E-80BF-B70DFC1C3A46}"/>
+              </a:ext>
+            </a:extLst>
+          </p:cNvPr>
+          <p:cNvSpPr txBox="1"/>
+          <p:nvPr/>
+        </p:nvSpPr>
+        <p:spPr>
+          <a:xfrm>
+            <a:off x="567542" y="1216429"/>
+            <a:ext cx="9491701" cy="1938992"/>
+          </a:xfrm>
+          <a:prstGeom prst="rect">
+            <a:avLst/>
+          </a:prstGeom>
+          <a:noFill/>
+        </p:spPr>
+        <p:txBody>
+          <a:bodyPr wrap="none" rtlCol="0">
+            <a:spAutoFit/>
+          </a:bodyPr>
+          <a:lstStyle/>
+          <a:p>
+            <a:r>
+              <a:rPr kumimoji="1" lang="ja-JP" altLang="en-US" sz="2400" dirty="0"/>
+              <a:t>このように</a:t>
+            </a:r>
+            <a:r>
+              <a:rPr kumimoji="1" lang="en-US" altLang="ja-JP" sz="2400" dirty="0"/>
+              <a:t>Pass</a:t>
+            </a:r>
+            <a:r>
+              <a:rPr kumimoji="1" lang="ja-JP" altLang="en-US" sz="2400" dirty="0"/>
+              <a:t>を複数用意して描画処理を分けることもできます。</a:t>
+            </a:r>
+            <a:endParaRPr kumimoji="1" lang="en-US" altLang="ja-JP" sz="2400" dirty="0"/>
+          </a:p>
+          <a:p>
+            <a:r>
+              <a:rPr lang="ja-JP" altLang="en-US" sz="2400" dirty="0"/>
+              <a:t>上か順に描画されるので気を付けましょう。</a:t>
+            </a:r>
+            <a:endParaRPr lang="en-US" altLang="ja-JP" sz="2400" dirty="0"/>
+          </a:p>
+          <a:p>
+            <a:endParaRPr kumimoji="1" lang="en-US" altLang="ja-JP" sz="2400" dirty="0"/>
+          </a:p>
+          <a:p>
             <a:r>
               <a:rPr lang="ja-JP" altLang="en-US" sz="2400" b="1" dirty="0">
                 <a:solidFill>
                   <a:srgbClr val="FF0000"/>
                 </a:solidFill>
               </a:rPr>
-              <a:t>テクスチャ</a:t>
-            </a:r>
-            <a:r>
-              <a:rPr lang="ja-JP" altLang="en-US" sz="2400" dirty="0"/>
-              <a:t>を使うと解決します。</a:t>
-            </a:r>
-            <a:endParaRPr lang="en-US" altLang="ja-JP" sz="2400" dirty="0"/>
-          </a:p>
-          <a:p>
-            <a:r>
-              <a:rPr kumimoji="1" lang="en-US" altLang="ja-JP" sz="2400" dirty="0"/>
-              <a:t>Ramp</a:t>
-            </a:r>
-            <a:r>
-              <a:rPr kumimoji="1" lang="ja-JP" altLang="en-US" sz="2400" dirty="0"/>
-              <a:t>テクスチャとは、</a:t>
-            </a:r>
-            <a:endParaRPr kumimoji="1" lang="en-US" altLang="ja-JP" sz="2400" dirty="0"/>
-          </a:p>
-          <a:p>
-            <a:r>
-              <a:rPr lang="ja-JP" altLang="en-US" sz="2400" b="1" dirty="0">
-                <a:solidFill>
-                  <a:srgbClr val="FF0000"/>
-                </a:solidFill>
-              </a:rPr>
-              <a:t>明るさ加減を１</a:t>
-            </a:r>
-            <a:r>
-              <a:rPr lang="en-US" altLang="ja-JP" sz="2400" b="1" dirty="0">
-                <a:solidFill>
-                  <a:srgbClr val="FF0000"/>
-                </a:solidFill>
-              </a:rPr>
-              <a:t>D</a:t>
-            </a:r>
-            <a:r>
-              <a:rPr lang="ja-JP" altLang="en-US" sz="2400" b="1" dirty="0">
-                <a:solidFill>
-                  <a:srgbClr val="FF0000"/>
-                </a:solidFill>
-              </a:rPr>
-              <a:t>にまとめたテクスチャ</a:t>
-            </a:r>
-            <a:r>
-              <a:rPr lang="ja-JP" altLang="en-US" sz="2400" dirty="0"/>
-              <a:t>のことです。</a:t>
-            </a:r>
-            <a:endParaRPr lang="en-US" altLang="ja-JP" sz="2400" dirty="0"/>
-          </a:p>
-          <a:p>
-            <a:endParaRPr kumimoji="1" lang="en-US" altLang="ja-JP" sz="2400" dirty="0"/>
-          </a:p>
-          <a:p>
-            <a:r>
-              <a:rPr lang="ja-JP" altLang="en-US" sz="2400" b="1" dirty="0">
-                <a:solidFill>
-                  <a:srgbClr val="FF0000"/>
-                </a:solidFill>
-              </a:rPr>
-              <a:t>■イメージ</a:t>
-            </a:r>
-            <a:endParaRPr kumimoji="1" lang="en-US" altLang="ja-JP" sz="2400" b="1" dirty="0">
+              <a:t>■今回の描画順</a:t>
+            </a:r>
+            <a:endParaRPr lang="en-US" altLang="ja-JP" sz="2400" b="1" dirty="0">
               <a:solidFill>
                 <a:srgbClr val="FF0000"/>
               </a:solidFill>
             </a:endParaRPr>
           </a:p>
+          <a:p>
+            <a:r>
+              <a:rPr kumimoji="1" lang="ja-JP" altLang="en-US" sz="2400" dirty="0"/>
+              <a:t>アウトライン→トゥーン</a:t>
+            </a:r>
+            <a:endParaRPr kumimoji="1" lang="en-US" altLang="ja-JP" sz="2400" dirty="0"/>
+          </a:p>
+        </p:txBody>
+      </p:sp>
+      <p:pic>
+        <p:nvPicPr>
+          <p:cNvPr id="3" name="図 2">
+            <a:extLst>
+              <a:ext uri="{FF2B5EF4-FFF2-40B4-BE49-F238E27FC236}">
+                <a16:creationId xmlns:a16="http://schemas.microsoft.com/office/drawing/2014/main" id="{AE7E82C6-3A02-4946-852A-05716BF0ACD9}"/>
+              </a:ext>
+            </a:extLst>
+          </p:cNvPr>
+          <p:cNvPicPr>
+            <a:picLocks noChangeAspect="1"/>
+          </p:cNvPicPr>
+          <p:nvPr/>
+        </p:nvPicPr>
+        <p:blipFill>
+          <a:blip r:embed="rId2"/>
+          <a:stretch>
+            <a:fillRect/>
+          </a:stretch>
+        </p:blipFill>
+        <p:spPr>
+          <a:xfrm>
+            <a:off x="567542" y="3295121"/>
+            <a:ext cx="7878274" cy="1209844"/>
+          </a:xfrm>
+          <a:prstGeom prst="rect">
+            <a:avLst/>
+          </a:prstGeom>
+        </p:spPr>
+      </p:pic>
+      <p:pic>
+        <p:nvPicPr>
+          <p:cNvPr id="8" name="図 7">
+            <a:extLst>
+              <a:ext uri="{FF2B5EF4-FFF2-40B4-BE49-F238E27FC236}">
+                <a16:creationId xmlns:a16="http://schemas.microsoft.com/office/drawing/2014/main" id="{132FDDB4-1000-4097-8A75-975D46092E70}"/>
+              </a:ext>
+            </a:extLst>
+          </p:cNvPr>
+          <p:cNvPicPr>
+            <a:picLocks noChangeAspect="1"/>
+          </p:cNvPicPr>
+          <p:nvPr/>
+        </p:nvPicPr>
+        <p:blipFill>
+          <a:blip r:embed="rId3"/>
+          <a:stretch>
+            <a:fillRect/>
+          </a:stretch>
+        </p:blipFill>
+        <p:spPr>
+          <a:xfrm>
+            <a:off x="567542" y="4646253"/>
+            <a:ext cx="4258269" cy="1200318"/>
+          </a:xfrm>
+          <a:prstGeom prst="rect">
+            <a:avLst/>
+          </a:prstGeom>
+        </p:spPr>
+      </p:pic>
+    </p:spTree>
+    <p:extLst>
+      <p:ext uri="{BB962C8B-B14F-4D97-AF65-F5344CB8AC3E}">
+        <p14:creationId xmlns:p14="http://schemas.microsoft.com/office/powerpoint/2010/main" val="2879420084"/>
+      </p:ext>
+    </p:extLst>
+  </p:cSld>
+  <p:clrMapOvr>
+    <a:masterClrMapping/>
+  </p:clrMapOvr>
+</p:sld>
+</file>
+
+<file path=ppt/slides/slide8.xml><?xml version="1.0" encoding="utf-8"?>
+<p:sld xmlns:a="http://schemas.openxmlformats.org/drawingml/2006/main" xmlns:r="http://schemas.openxmlformats.org/officeDocument/2006/relationships" xmlns:p="http://schemas.openxmlformats.org/presentationml/2006/main">
+  <p:cSld>
+    <p:spTree>
+      <p:nvGrpSpPr>
+        <p:cNvPr id="1" name=""/>
+        <p:cNvGrpSpPr/>
+        <p:nvPr/>
+      </p:nvGrpSpPr>
+      <p:grpSpPr>
+        <a:xfrm>
+          <a:off x="0" y="0"/>
+          <a:ext cx="0" cy="0"/>
+          <a:chOff x="0" y="0"/>
+          <a:chExt cx="0" cy="0"/>
+        </a:xfrm>
+      </p:grpSpPr>
+      <p:sp>
+        <p:nvSpPr>
+          <p:cNvPr id="4" name="テキスト ボックス 3">
+            <a:extLst>
+              <a:ext uri="{FF2B5EF4-FFF2-40B4-BE49-F238E27FC236}">
+                <a16:creationId xmlns:a16="http://schemas.microsoft.com/office/drawing/2014/main" id="{5A13BF46-B8C5-48AA-8308-C9ECFF431A18}"/>
+              </a:ext>
+            </a:extLst>
+          </p:cNvPr>
+          <p:cNvSpPr txBox="1"/>
+          <p:nvPr/>
+        </p:nvSpPr>
+        <p:spPr>
+          <a:xfrm>
+            <a:off x="567542" y="491954"/>
+            <a:ext cx="2646878" cy="584775"/>
+          </a:xfrm>
+          <a:prstGeom prst="rect">
+            <a:avLst/>
+          </a:prstGeom>
+          <a:noFill/>
+        </p:spPr>
+        <p:txBody>
+          <a:bodyPr wrap="none" rtlCol="0">
+            <a:spAutoFit/>
+          </a:bodyPr>
+          <a:lstStyle/>
+          <a:p>
+            <a:r>
+              <a:rPr kumimoji="1" lang="ja-JP" altLang="en-US" sz="3200" b="1" u="sng" dirty="0"/>
+              <a:t>アウトライン</a:t>
+            </a:r>
+            <a:endParaRPr kumimoji="1" lang="en-US" altLang="ja-JP" sz="3200" b="1" u="sng" dirty="0"/>
+          </a:p>
+        </p:txBody>
+      </p:sp>
+      <p:sp>
+        <p:nvSpPr>
+          <p:cNvPr id="6" name="テキスト ボックス 5">
+            <a:extLst>
+              <a:ext uri="{FF2B5EF4-FFF2-40B4-BE49-F238E27FC236}">
+                <a16:creationId xmlns:a16="http://schemas.microsoft.com/office/drawing/2014/main" id="{55830AD6-028B-4C4E-80BF-B70DFC1C3A46}"/>
+              </a:ext>
+            </a:extLst>
+          </p:cNvPr>
+          <p:cNvSpPr txBox="1"/>
+          <p:nvPr/>
+        </p:nvSpPr>
+        <p:spPr>
+          <a:xfrm>
+            <a:off x="567542" y="1216429"/>
+            <a:ext cx="6647974" cy="461665"/>
+          </a:xfrm>
+          <a:prstGeom prst="rect">
+            <a:avLst/>
+          </a:prstGeom>
+          <a:noFill/>
+        </p:spPr>
+        <p:txBody>
+          <a:bodyPr wrap="none" rtlCol="0">
+            <a:spAutoFit/>
+          </a:bodyPr>
+          <a:lstStyle/>
+          <a:p>
+            <a:r>
+              <a:rPr kumimoji="1" lang="ja-JP" altLang="en-US" sz="2400" dirty="0"/>
+              <a:t>アウトラインの仕組みはとてもシンプルです。</a:t>
+            </a:r>
+            <a:endParaRPr kumimoji="1" lang="en-US" altLang="ja-JP" sz="2400" dirty="0"/>
+          </a:p>
+        </p:txBody>
+      </p:sp>
+      <p:sp>
+        <p:nvSpPr>
+          <p:cNvPr id="2" name="楕円 1">
+            <a:extLst>
+              <a:ext uri="{FF2B5EF4-FFF2-40B4-BE49-F238E27FC236}">
+                <a16:creationId xmlns:a16="http://schemas.microsoft.com/office/drawing/2014/main" id="{FD7A5CEE-B644-4B8C-8588-FF790A80EEA4}"/>
+              </a:ext>
+            </a:extLst>
+          </p:cNvPr>
+          <p:cNvSpPr/>
+          <p:nvPr/>
+        </p:nvSpPr>
+        <p:spPr>
+          <a:xfrm>
+            <a:off x="702732" y="2777067"/>
+            <a:ext cx="1440000" cy="1440000"/>
+          </a:xfrm>
+          <a:prstGeom prst="ellipse">
+            <a:avLst/>
+          </a:prstGeom>
+          <a:solidFill>
+            <a:schemeClr val="bg1">
+              <a:lumMod val="65000"/>
+            </a:schemeClr>
+          </a:solidFill>
+          <a:ln>
+            <a:noFill/>
+          </a:ln>
+        </p:spPr>
+        <p:style>
+          <a:lnRef idx="2">
+            <a:schemeClr val="accent1">
+              <a:shade val="50000"/>
+            </a:schemeClr>
+          </a:lnRef>
+          <a:fillRef idx="1">
+            <a:schemeClr val="accent1"/>
+          </a:fillRef>
+          <a:effectRef idx="0">
+            <a:schemeClr val="accent1"/>
+          </a:effectRef>
+          <a:fontRef idx="minor">
+            <a:schemeClr val="lt1"/>
+          </a:fontRef>
+        </p:style>
+        <p:txBody>
+          <a:bodyPr rtlCol="0" anchor="ctr"/>
+          <a:lstStyle/>
+          <a:p>
+            <a:pPr algn="ctr"/>
+            <a:endParaRPr kumimoji="1" lang="ja-JP" altLang="en-US"/>
+          </a:p>
         </p:txBody>
       </p:sp>
       <p:grpSp>
         <p:nvGrpSpPr>
-          <p:cNvPr id="13" name="グループ化 12">
-            <a:extLst>
-              <a:ext uri="{FF2B5EF4-FFF2-40B4-BE49-F238E27FC236}">
-                <a16:creationId xmlns:a16="http://schemas.microsoft.com/office/drawing/2014/main" id="{06ED21DA-ACA8-4EB9-833B-71AFA3111E21}"/>
+          <p:cNvPr id="5" name="グループ化 4">
+            <a:extLst>
+              <a:ext uri="{FF2B5EF4-FFF2-40B4-BE49-F238E27FC236}">
+                <a16:creationId xmlns:a16="http://schemas.microsoft.com/office/drawing/2014/main" id="{46FB2B6A-2D87-4BA4-8A93-D5F004DE38D5}"/>
               </a:ext>
             </a:extLst>
           </p:cNvPr>
@@ -4068,18 +5256,18 @@
         </p:nvGrpSpPr>
         <p:grpSpPr>
           <a:xfrm>
-            <a:off x="567542" y="3227293"/>
-            <a:ext cx="10408023" cy="779931"/>
-            <a:chOff x="567542" y="2556458"/>
-            <a:chExt cx="10408023" cy="779931"/>
+            <a:off x="3974407" y="2619000"/>
+            <a:ext cx="1620000" cy="1620000"/>
+            <a:chOff x="3081529" y="2619000"/>
+            <a:chExt cx="1620000" cy="1620000"/>
           </a:xfrm>
         </p:grpSpPr>
         <p:sp>
           <p:nvSpPr>
-            <p:cNvPr id="10" name="正方形/長方形 9">
+            <p:cNvPr id="7" name="楕円 6">
               <a:extLst>
                 <a:ext uri="{FF2B5EF4-FFF2-40B4-BE49-F238E27FC236}">
-                  <a16:creationId xmlns:a16="http://schemas.microsoft.com/office/drawing/2014/main" id="{900CF49D-2F92-4077-B4BF-17C907345C7E}"/>
+                  <a16:creationId xmlns:a16="http://schemas.microsoft.com/office/drawing/2014/main" id="{69BBBD7C-301F-401D-A12F-71AD85CF2E1E}"/>
                 </a:ext>
               </a:extLst>
             </p:cNvPr>
@@ -4088,10 +5276,137 @@
           </p:nvSpPr>
           <p:spPr>
             <a:xfrm>
-              <a:off x="567542" y="2556460"/>
-              <a:ext cx="3469341" cy="779929"/>
+              <a:off x="3197261" y="2777067"/>
+              <a:ext cx="1440000" cy="1440000"/>
             </a:xfrm>
-            <a:prstGeom prst="rect">
+            <a:prstGeom prst="ellipse">
+              <a:avLst/>
+            </a:prstGeom>
+            <a:solidFill>
+              <a:schemeClr val="bg1">
+                <a:lumMod val="95000"/>
+              </a:schemeClr>
+            </a:solidFill>
+            <a:ln>
+              <a:noFill/>
+            </a:ln>
+          </p:spPr>
+          <p:style>
+            <a:lnRef idx="2">
+              <a:schemeClr val="accent1">
+                <a:shade val="50000"/>
+              </a:schemeClr>
+            </a:lnRef>
+            <a:fillRef idx="1">
+              <a:schemeClr val="accent1"/>
+            </a:fillRef>
+            <a:effectRef idx="0">
+              <a:schemeClr val="accent1"/>
+            </a:effectRef>
+            <a:fontRef idx="minor">
+              <a:schemeClr val="lt1"/>
+            </a:fontRef>
+          </p:style>
+          <p:txBody>
+            <a:bodyPr rtlCol="0" anchor="ctr"/>
+            <a:lstStyle/>
+            <a:p>
+              <a:pPr algn="ctr"/>
+              <a:endParaRPr kumimoji="1" lang="ja-JP" altLang="en-US"/>
+            </a:p>
+          </p:txBody>
+        </p:sp>
+        <p:sp>
+          <p:nvSpPr>
+            <p:cNvPr id="9" name="楕円 8">
+              <a:extLst>
+                <a:ext uri="{FF2B5EF4-FFF2-40B4-BE49-F238E27FC236}">
+                  <a16:creationId xmlns:a16="http://schemas.microsoft.com/office/drawing/2014/main" id="{76B3D14C-1E83-44DB-90B2-A7CE577421AE}"/>
+                </a:ext>
+              </a:extLst>
+            </p:cNvPr>
+            <p:cNvSpPr/>
+            <p:nvPr/>
+          </p:nvSpPr>
+          <p:spPr>
+            <a:xfrm>
+              <a:off x="3081529" y="2619000"/>
+              <a:ext cx="1620000" cy="1620000"/>
+            </a:xfrm>
+            <a:prstGeom prst="ellipse">
+              <a:avLst/>
+            </a:prstGeom>
+            <a:solidFill>
+              <a:schemeClr val="tx1"/>
+            </a:solidFill>
+            <a:ln>
+              <a:noFill/>
+            </a:ln>
+          </p:spPr>
+          <p:style>
+            <a:lnRef idx="2">
+              <a:schemeClr val="accent1">
+                <a:shade val="50000"/>
+              </a:schemeClr>
+            </a:lnRef>
+            <a:fillRef idx="1">
+              <a:schemeClr val="accent1"/>
+            </a:fillRef>
+            <a:effectRef idx="0">
+              <a:schemeClr val="accent1"/>
+            </a:effectRef>
+            <a:fontRef idx="minor">
+              <a:schemeClr val="lt1"/>
+            </a:fontRef>
+          </p:style>
+          <p:txBody>
+            <a:bodyPr rtlCol="0" anchor="ctr"/>
+            <a:lstStyle/>
+            <a:p>
+              <a:pPr algn="ctr"/>
+              <a:endParaRPr kumimoji="1" lang="ja-JP" altLang="en-US"/>
+            </a:p>
+          </p:txBody>
+        </p:sp>
+      </p:grpSp>
+      <p:grpSp>
+        <p:nvGrpSpPr>
+          <p:cNvPr id="13" name="グループ化 12">
+            <a:extLst>
+              <a:ext uri="{FF2B5EF4-FFF2-40B4-BE49-F238E27FC236}">
+                <a16:creationId xmlns:a16="http://schemas.microsoft.com/office/drawing/2014/main" id="{4F114402-082A-4019-980A-6B8282A31814}"/>
+              </a:ext>
+            </a:extLst>
+          </p:cNvPr>
+          <p:cNvGrpSpPr/>
+          <p:nvPr/>
+        </p:nvGrpSpPr>
+        <p:grpSpPr>
+          <a:xfrm>
+            <a:off x="8322727" y="2619000"/>
+            <a:ext cx="1620000" cy="1620000"/>
+            <a:chOff x="5757327" y="2665134"/>
+            <a:chExt cx="1620000" cy="1620000"/>
+          </a:xfrm>
+        </p:grpSpPr>
+        <p:sp>
+          <p:nvSpPr>
+            <p:cNvPr id="11" name="楕円 10">
+              <a:extLst>
+                <a:ext uri="{FF2B5EF4-FFF2-40B4-BE49-F238E27FC236}">
+                  <a16:creationId xmlns:a16="http://schemas.microsoft.com/office/drawing/2014/main" id="{D2605E97-8A72-463B-AE31-E78C6AAE6115}"/>
+                </a:ext>
+              </a:extLst>
+            </p:cNvPr>
+            <p:cNvSpPr/>
+            <p:nvPr/>
+          </p:nvSpPr>
+          <p:spPr>
+            <a:xfrm>
+              <a:off x="5757327" y="2665134"/>
+              <a:ext cx="1620000" cy="1620000"/>
+            </a:xfrm>
+            <a:prstGeom prst="ellipse">
               <a:avLst/>
             </a:prstGeom>
             <a:solidFill>
@@ -4128,10 +5443,10 @@
         </p:sp>
         <p:sp>
           <p:nvSpPr>
-            <p:cNvPr id="11" name="正方形/長方形 10">
+            <p:cNvPr id="10" name="楕円 9">
               <a:extLst>
                 <a:ext uri="{FF2B5EF4-FFF2-40B4-BE49-F238E27FC236}">
-                  <a16:creationId xmlns:a16="http://schemas.microsoft.com/office/drawing/2014/main" id="{7C903B8B-FCFC-413C-911A-27BEBA2631DC}"/>
+                  <a16:creationId xmlns:a16="http://schemas.microsoft.com/office/drawing/2014/main" id="{37CBBFBF-D4C8-401D-AA7A-270C88DAABFC}"/>
                 </a:ext>
               </a:extLst>
             </p:cNvPr>
@@ -4140,10 +5455,10 @@
           </p:nvSpPr>
           <p:spPr>
             <a:xfrm>
-              <a:off x="4036883" y="2556459"/>
-              <a:ext cx="3469341" cy="779929"/>
+              <a:off x="5847327" y="2755134"/>
+              <a:ext cx="1440000" cy="1440000"/>
             </a:xfrm>
-            <a:prstGeom prst="rect">
+            <a:prstGeom prst="ellipse">
               <a:avLst/>
             </a:prstGeom>
             <a:solidFill>
@@ -4180,97 +5495,13 @@
             </a:p>
           </p:txBody>
         </p:sp>
-        <p:sp>
-          <p:nvSpPr>
-            <p:cNvPr id="12" name="正方形/長方形 11">
-              <a:extLst>
-                <a:ext uri="{FF2B5EF4-FFF2-40B4-BE49-F238E27FC236}">
-                  <a16:creationId xmlns:a16="http://schemas.microsoft.com/office/drawing/2014/main" id="{3B01EF0B-71AF-4EB1-8F90-ED1E7C417684}"/>
-                </a:ext>
-              </a:extLst>
-            </p:cNvPr>
-            <p:cNvSpPr/>
-            <p:nvPr/>
-          </p:nvSpPr>
-          <p:spPr>
-            <a:xfrm>
-              <a:off x="7506224" y="2556458"/>
-              <a:ext cx="3469341" cy="779929"/>
-            </a:xfrm>
-            <a:prstGeom prst="rect">
-              <a:avLst/>
-            </a:prstGeom>
-            <a:solidFill>
-              <a:schemeClr val="bg1">
-                <a:lumMod val="95000"/>
-              </a:schemeClr>
-            </a:solidFill>
-            <a:ln>
-              <a:noFill/>
-            </a:ln>
-          </p:spPr>
-          <p:style>
-            <a:lnRef idx="2">
-              <a:schemeClr val="accent1">
-                <a:shade val="50000"/>
-              </a:schemeClr>
-            </a:lnRef>
-            <a:fillRef idx="1">
-              <a:schemeClr val="accent1"/>
-            </a:fillRef>
-            <a:effectRef idx="0">
-              <a:schemeClr val="accent1"/>
-            </a:effectRef>
-            <a:fontRef idx="minor">
-              <a:schemeClr val="lt1"/>
-            </a:fontRef>
-          </p:style>
-          <p:txBody>
-            <a:bodyPr rtlCol="0" anchor="ctr"/>
-            <a:lstStyle/>
-            <a:p>
-              <a:pPr algn="ctr"/>
-              <a:endParaRPr kumimoji="1" lang="ja-JP" altLang="en-US"/>
-            </a:p>
-          </p:txBody>
-        </p:sp>
       </p:grpSp>
-    </p:spTree>
-    <p:extLst>
-      <p:ext uri="{BB962C8B-B14F-4D97-AF65-F5344CB8AC3E}">
-        <p14:creationId xmlns:p14="http://schemas.microsoft.com/office/powerpoint/2010/main" val="2937518239"/>
-      </p:ext>
-    </p:extLst>
-  </p:cSld>
-  <p:clrMapOvr>
-    <a:masterClrMapping/>
-  </p:clrMapOvr>
-</p:sld>
-</file>
-
-<file path=ppt/slides/slide3.xml><?xml version="1.0" encoding="utf-8"?>
-<p:sld xmlns:a="http://schemas.openxmlformats.org/drawingml/2006/main" xmlns:r="http://schemas.openxmlformats.org/officeDocument/2006/relationships" xmlns:p="http://schemas.openxmlformats.org/presentationml/2006/main">
-  <p:cSld>
-    <p:spTree>
-      <p:nvGrpSpPr>
-        <p:cNvPr id="1" name=""/>
-        <p:cNvGrpSpPr/>
-        <p:nvPr/>
-      </p:nvGrpSpPr>
-      <p:grpSpPr>
-        <a:xfrm>
-          <a:off x="0" y="0"/>
-          <a:ext cx="0" cy="0"/>
-          <a:chOff x="0" y="0"/>
-          <a:chExt cx="0" cy="0"/>
-        </a:xfrm>
-      </p:grpSpPr>
-      <p:sp>
-        <p:nvSpPr>
-          <p:cNvPr id="4" name="テキスト ボックス 3">
-            <a:extLst>
-              <a:ext uri="{FF2B5EF4-FFF2-40B4-BE49-F238E27FC236}">
-                <a16:creationId xmlns:a16="http://schemas.microsoft.com/office/drawing/2014/main" id="{5A13BF46-B8C5-48AA-8308-C9ECFF431A18}"/>
+      <p:sp>
+        <p:nvSpPr>
+          <p:cNvPr id="12" name="テキスト ボックス 11">
+            <a:extLst>
+              <a:ext uri="{FF2B5EF4-FFF2-40B4-BE49-F238E27FC236}">
+                <a16:creationId xmlns:a16="http://schemas.microsoft.com/office/drawing/2014/main" id="{E6347D5F-3DA0-4714-B8CC-FB67D5718D7E}"/>
               </a:ext>
             </a:extLst>
           </p:cNvPr>
@@ -4279,8 +5510,8 @@
         </p:nvSpPr>
         <p:spPr>
           <a:xfrm>
-            <a:off x="567542" y="491954"/>
-            <a:ext cx="3877985" cy="584775"/>
+            <a:off x="522485" y="4539134"/>
+            <a:ext cx="1800493" cy="369332"/>
           </a:xfrm>
           <a:prstGeom prst="rect">
             <a:avLst/>
@@ -4294,19 +5525,19 @@
           <a:lstStyle/>
           <a:p>
             <a:r>
-              <a:rPr kumimoji="1" lang="ja-JP" altLang="en-US" sz="3200" b="1" u="sng" dirty="0"/>
-              <a:t>トゥーンシェーダー</a:t>
-            </a:r>
-            <a:endParaRPr kumimoji="1" lang="en-US" altLang="ja-JP" sz="3200" b="1" u="sng" dirty="0"/>
-          </a:p>
-        </p:txBody>
-      </p:sp>
-      <p:sp>
-        <p:nvSpPr>
-          <p:cNvPr id="6" name="テキスト ボックス 5">
-            <a:extLst>
-              <a:ext uri="{FF2B5EF4-FFF2-40B4-BE49-F238E27FC236}">
-                <a16:creationId xmlns:a16="http://schemas.microsoft.com/office/drawing/2014/main" id="{55830AD6-028B-4C4E-80BF-B70DFC1C3A46}"/>
+              <a:rPr lang="ja-JP" altLang="en-US" dirty="0"/>
+              <a:t>モデルに対して</a:t>
+            </a:r>
+            <a:endParaRPr kumimoji="1" lang="en-US" altLang="ja-JP" dirty="0"/>
+          </a:p>
+        </p:txBody>
+      </p:sp>
+      <p:sp>
+        <p:nvSpPr>
+          <p:cNvPr id="14" name="テキスト ボックス 13">
+            <a:extLst>
+              <a:ext uri="{FF2B5EF4-FFF2-40B4-BE49-F238E27FC236}">
+                <a16:creationId xmlns:a16="http://schemas.microsoft.com/office/drawing/2014/main" id="{A9C0C2D2-684C-41A7-9F08-0E624CF218FB}"/>
               </a:ext>
             </a:extLst>
           </p:cNvPr>
@@ -4315,8 +5546,8 @@
         </p:nvSpPr>
         <p:spPr>
           <a:xfrm>
-            <a:off x="567542" y="1216429"/>
-            <a:ext cx="5995552" cy="461665"/>
+            <a:off x="2873113" y="4539134"/>
+            <a:ext cx="3874052" cy="923330"/>
           </a:xfrm>
           <a:prstGeom prst="rect">
             <a:avLst/>
@@ -4324,93 +5555,42 @@
           <a:noFill/>
         </p:spPr>
         <p:txBody>
-          <a:bodyPr wrap="none" rtlCol="0">
+          <a:bodyPr wrap="square" rtlCol="0">
             <a:spAutoFit/>
           </a:bodyPr>
           <a:lstStyle/>
           <a:p>
-            <a:r>
-              <a:rPr kumimoji="1" lang="en-US" altLang="ja-JP" sz="2400" b="1" dirty="0" err="1">
-                <a:solidFill>
-                  <a:srgbClr val="FF0000"/>
-                </a:solidFill>
-              </a:rPr>
-              <a:t>RampToon.shader</a:t>
-            </a:r>
-            <a:r>
-              <a:rPr kumimoji="1" lang="ja-JP" altLang="en-US" sz="2400" dirty="0"/>
-              <a:t>を追加して書きます。</a:t>
-            </a:r>
-            <a:endParaRPr kumimoji="1" lang="en-US" altLang="ja-JP" sz="2400" dirty="0"/>
-          </a:p>
-        </p:txBody>
-      </p:sp>
-      <p:pic>
-        <p:nvPicPr>
-          <p:cNvPr id="3" name="図 2">
-            <a:extLst>
-              <a:ext uri="{FF2B5EF4-FFF2-40B4-BE49-F238E27FC236}">
-                <a16:creationId xmlns:a16="http://schemas.microsoft.com/office/drawing/2014/main" id="{C8DC513D-F1E0-4593-93B3-E52A3923A5D5}"/>
-              </a:ext>
-            </a:extLst>
-          </p:cNvPr>
-          <p:cNvPicPr>
-            <a:picLocks noChangeAspect="1"/>
-          </p:cNvPicPr>
-          <p:nvPr/>
-        </p:nvPicPr>
-        <p:blipFill>
-          <a:blip r:embed="rId2"/>
-          <a:stretch>
-            <a:fillRect/>
-          </a:stretch>
-        </p:blipFill>
-        <p:spPr>
-          <a:xfrm>
-            <a:off x="567542" y="1817794"/>
-            <a:ext cx="9625329" cy="4604527"/>
-          </a:xfrm>
-          <a:prstGeom prst="rect">
-            <a:avLst/>
-          </a:prstGeom>
-        </p:spPr>
-      </p:pic>
-    </p:spTree>
-    <p:extLst>
-      <p:ext uri="{BB962C8B-B14F-4D97-AF65-F5344CB8AC3E}">
-        <p14:creationId xmlns:p14="http://schemas.microsoft.com/office/powerpoint/2010/main" val="2614117437"/>
-      </p:ext>
-    </p:extLst>
-  </p:cSld>
-  <p:clrMapOvr>
-    <a:masterClrMapping/>
-  </p:clrMapOvr>
-</p:sld>
-</file>
-
-<file path=ppt/slides/slide4.xml><?xml version="1.0" encoding="utf-8"?>
-<p:sld xmlns:a="http://schemas.openxmlformats.org/drawingml/2006/main" xmlns:r="http://schemas.openxmlformats.org/officeDocument/2006/relationships" xmlns:p="http://schemas.openxmlformats.org/presentationml/2006/main">
-  <p:cSld>
-    <p:spTree>
-      <p:nvGrpSpPr>
-        <p:cNvPr id="1" name=""/>
-        <p:cNvGrpSpPr/>
-        <p:nvPr/>
-      </p:nvGrpSpPr>
-      <p:grpSpPr>
-        <a:xfrm>
-          <a:off x="0" y="0"/>
-          <a:ext cx="0" cy="0"/>
-          <a:chOff x="0" y="0"/>
-          <a:chExt cx="0" cy="0"/>
-        </a:xfrm>
-      </p:grpSpPr>
-      <p:sp>
-        <p:nvSpPr>
-          <p:cNvPr id="4" name="テキスト ボックス 3">
-            <a:extLst>
-              <a:ext uri="{FF2B5EF4-FFF2-40B4-BE49-F238E27FC236}">
-                <a16:creationId xmlns:a16="http://schemas.microsoft.com/office/drawing/2014/main" id="{5A13BF46-B8C5-48AA-8308-C9ECFF431A18}"/>
+            <a:pPr algn="ctr"/>
+            <a:r>
+              <a:rPr lang="ja-JP" altLang="en-US" dirty="0"/>
+              <a:t>少しだけ拡大したものを描画する。</a:t>
+            </a:r>
+            <a:endParaRPr lang="en-US" altLang="ja-JP" dirty="0"/>
+          </a:p>
+          <a:p>
+            <a:pPr algn="ctr"/>
+            <a:r>
+              <a:rPr kumimoji="1" lang="ja-JP" altLang="en-US" dirty="0"/>
+              <a:t>ただしこのままだと</a:t>
+            </a:r>
+            <a:endParaRPr kumimoji="1" lang="en-US" altLang="ja-JP" dirty="0"/>
+          </a:p>
+          <a:p>
+            <a:pPr algn="ctr"/>
+            <a:r>
+              <a:rPr lang="ja-JP" altLang="en-US" dirty="0"/>
+              <a:t>アウトラインに覆われてしまうので</a:t>
+            </a:r>
+            <a:endParaRPr kumimoji="1" lang="en-US" altLang="ja-JP" dirty="0"/>
+          </a:p>
+        </p:txBody>
+      </p:sp>
+      <p:sp>
+        <p:nvSpPr>
+          <p:cNvPr id="15" name="テキスト ボックス 14">
+            <a:extLst>
+              <a:ext uri="{FF2B5EF4-FFF2-40B4-BE49-F238E27FC236}">
+                <a16:creationId xmlns:a16="http://schemas.microsoft.com/office/drawing/2014/main" id="{AD975140-CE65-4812-8451-4F6E48747980}"/>
               </a:ext>
             </a:extLst>
           </p:cNvPr>
@@ -4419,8 +5599,8 @@
         </p:nvSpPr>
         <p:spPr>
           <a:xfrm>
-            <a:off x="567542" y="491954"/>
-            <a:ext cx="3877985" cy="584775"/>
+            <a:off x="7297301" y="4539134"/>
+            <a:ext cx="3874052" cy="369332"/>
           </a:xfrm>
           <a:prstGeom prst="rect">
             <a:avLst/>
@@ -4428,956 +5608,116 @@
           <a:noFill/>
         </p:spPr>
         <p:txBody>
-          <a:bodyPr wrap="none" rtlCol="0">
+          <a:bodyPr wrap="square" rtlCol="0">
             <a:spAutoFit/>
           </a:bodyPr>
           <a:lstStyle/>
           <a:p>
-            <a:r>
-              <a:rPr kumimoji="1" lang="ja-JP" altLang="en-US" sz="3200" b="1" u="sng" dirty="0"/>
-              <a:t>トゥーンシェーダー</a:t>
-            </a:r>
-            <a:endParaRPr kumimoji="1" lang="en-US" altLang="ja-JP" sz="3200" b="1" u="sng" dirty="0"/>
-          </a:p>
-        </p:txBody>
-      </p:sp>
-      <p:sp>
-        <p:nvSpPr>
-          <p:cNvPr id="6" name="テキスト ボックス 5">
-            <a:extLst>
-              <a:ext uri="{FF2B5EF4-FFF2-40B4-BE49-F238E27FC236}">
-                <a16:creationId xmlns:a16="http://schemas.microsoft.com/office/drawing/2014/main" id="{55830AD6-028B-4C4E-80BF-B70DFC1C3A46}"/>
-              </a:ext>
-            </a:extLst>
-          </p:cNvPr>
-          <p:cNvSpPr txBox="1"/>
+            <a:pPr algn="ctr"/>
+            <a:r>
+              <a:rPr lang="ja-JP" altLang="en-US" dirty="0"/>
+              <a:t>アウトラインは裏面だけ描画する</a:t>
+            </a:r>
+            <a:endParaRPr kumimoji="1" lang="en-US" altLang="ja-JP" dirty="0"/>
+          </a:p>
+        </p:txBody>
+      </p:sp>
+      <p:sp>
+        <p:nvSpPr>
+          <p:cNvPr id="16" name="矢印: 右 15">
+            <a:extLst>
+              <a:ext uri="{FF2B5EF4-FFF2-40B4-BE49-F238E27FC236}">
+                <a16:creationId xmlns:a16="http://schemas.microsoft.com/office/drawing/2014/main" id="{352895E8-BABD-452C-823D-7EA57A0E105B}"/>
+              </a:ext>
+            </a:extLst>
+          </p:cNvPr>
+          <p:cNvSpPr/>
           <p:nvPr/>
         </p:nvSpPr>
         <p:spPr>
           <a:xfrm>
-            <a:off x="567542" y="1216429"/>
-            <a:ext cx="4456669" cy="461665"/>
-          </a:xfrm>
-          <a:prstGeom prst="rect">
+            <a:off x="2692400" y="3183467"/>
+            <a:ext cx="855133" cy="575733"/>
+          </a:xfrm>
+          <a:prstGeom prst="rightArrow">
             <a:avLst/>
           </a:prstGeom>
-          <a:noFill/>
-        </p:spPr>
-        <p:txBody>
-          <a:bodyPr wrap="none" rtlCol="0">
-            <a:spAutoFit/>
-          </a:bodyPr>
-          <a:lstStyle/>
-          <a:p>
-            <a:r>
-              <a:rPr kumimoji="1" lang="en-US" altLang="ja-JP" sz="2400" b="1" dirty="0" err="1">
-                <a:solidFill>
-                  <a:srgbClr val="FF0000"/>
-                </a:solidFill>
-              </a:rPr>
-              <a:t>RampToon.shader</a:t>
-            </a:r>
-            <a:r>
-              <a:rPr kumimoji="1" lang="ja-JP" altLang="en-US" sz="2400" dirty="0"/>
-              <a:t>（その２）</a:t>
-            </a:r>
-            <a:endParaRPr kumimoji="1" lang="en-US" altLang="ja-JP" sz="2400" dirty="0"/>
-          </a:p>
-        </p:txBody>
-      </p:sp>
-      <p:pic>
-        <p:nvPicPr>
-          <p:cNvPr id="5" name="図 4">
-            <a:extLst>
-              <a:ext uri="{FF2B5EF4-FFF2-40B4-BE49-F238E27FC236}">
-                <a16:creationId xmlns:a16="http://schemas.microsoft.com/office/drawing/2014/main" id="{8640F417-3347-4350-92AB-93C02E196B3F}"/>
-              </a:ext>
-            </a:extLst>
-          </p:cNvPr>
-          <p:cNvPicPr>
-            <a:picLocks noChangeAspect="1"/>
-          </p:cNvPicPr>
+        </p:spPr>
+        <p:style>
+          <a:lnRef idx="2">
+            <a:schemeClr val="accent1">
+              <a:shade val="50000"/>
+            </a:schemeClr>
+          </a:lnRef>
+          <a:fillRef idx="1">
+            <a:schemeClr val="accent1"/>
+          </a:fillRef>
+          <a:effectRef idx="0">
+            <a:schemeClr val="accent1"/>
+          </a:effectRef>
+          <a:fontRef idx="minor">
+            <a:schemeClr val="lt1"/>
+          </a:fontRef>
+        </p:style>
+        <p:txBody>
+          <a:bodyPr rtlCol="0" anchor="ctr"/>
+          <a:lstStyle/>
+          <a:p>
+            <a:pPr algn="ctr"/>
+            <a:endParaRPr kumimoji="1" lang="ja-JP" altLang="en-US"/>
+          </a:p>
+        </p:txBody>
+      </p:sp>
+      <p:sp>
+        <p:nvSpPr>
+          <p:cNvPr id="17" name="矢印: 右 16">
+            <a:extLst>
+              <a:ext uri="{FF2B5EF4-FFF2-40B4-BE49-F238E27FC236}">
+                <a16:creationId xmlns:a16="http://schemas.microsoft.com/office/drawing/2014/main" id="{BFC6F52F-CFDD-439A-A90E-ADA3FE7D8839}"/>
+              </a:ext>
+            </a:extLst>
+          </p:cNvPr>
+          <p:cNvSpPr/>
           <p:nvPr/>
-        </p:nvPicPr>
-        <p:blipFill>
-          <a:blip r:embed="rId2"/>
-          <a:stretch>
-            <a:fillRect/>
-          </a:stretch>
-        </p:blipFill>
-        <p:spPr>
-          <a:xfrm>
-            <a:off x="567542" y="1817793"/>
-            <a:ext cx="8971302" cy="4421641"/>
-          </a:xfrm>
-          <a:prstGeom prst="rect">
+        </p:nvSpPr>
+        <p:spPr>
+          <a:xfrm>
+            <a:off x="6597595" y="3183466"/>
+            <a:ext cx="855133" cy="575733"/>
+          </a:xfrm>
+          <a:prstGeom prst="rightArrow">
             <a:avLst/>
           </a:prstGeom>
         </p:spPr>
-      </p:pic>
+        <p:style>
+          <a:lnRef idx="2">
+            <a:schemeClr val="accent1">
+              <a:shade val="50000"/>
+            </a:schemeClr>
+          </a:lnRef>
+          <a:fillRef idx="1">
+            <a:schemeClr val="accent1"/>
+          </a:fillRef>
+          <a:effectRef idx="0">
+            <a:schemeClr val="accent1"/>
+          </a:effectRef>
+          <a:fontRef idx="minor">
+            <a:schemeClr val="lt1"/>
+          </a:fontRef>
+        </p:style>
+        <p:txBody>
+          <a:bodyPr rtlCol="0" anchor="ctr"/>
+          <a:lstStyle/>
+          <a:p>
+            <a:pPr algn="ctr"/>
+            <a:endParaRPr kumimoji="1" lang="ja-JP" altLang="en-US"/>
+          </a:p>
+        </p:txBody>
+      </p:sp>
     </p:spTree>
     <p:extLst>
       <p:ext uri="{BB962C8B-B14F-4D97-AF65-F5344CB8AC3E}">
-        <p14:creationId xmlns:p14="http://schemas.microsoft.com/office/powerpoint/2010/main" val="3549067937"/>
-      </p:ext>
-    </p:extLst>
-  </p:cSld>
-  <p:clrMapOvr>
-    <a:masterClrMapping/>
-  </p:clrMapOvr>
-</p:sld>
-</file>
-
-<file path=ppt/slides/slide5.xml><?xml version="1.0" encoding="utf-8"?>
-<p:sld xmlns:a="http://schemas.openxmlformats.org/drawingml/2006/main" xmlns:r="http://schemas.openxmlformats.org/officeDocument/2006/relationships" xmlns:p="http://schemas.openxmlformats.org/presentationml/2006/main">
-  <p:cSld>
-    <p:spTree>
-      <p:nvGrpSpPr>
-        <p:cNvPr id="1" name=""/>
-        <p:cNvGrpSpPr/>
-        <p:nvPr/>
-      </p:nvGrpSpPr>
-      <p:grpSpPr>
-        <a:xfrm>
-          <a:off x="0" y="0"/>
-          <a:ext cx="0" cy="0"/>
-          <a:chOff x="0" y="0"/>
-          <a:chExt cx="0" cy="0"/>
-        </a:xfrm>
-      </p:grpSpPr>
-      <p:sp>
-        <p:nvSpPr>
-          <p:cNvPr id="4" name="テキスト ボックス 3">
-            <a:extLst>
-              <a:ext uri="{FF2B5EF4-FFF2-40B4-BE49-F238E27FC236}">
-                <a16:creationId xmlns:a16="http://schemas.microsoft.com/office/drawing/2014/main" id="{5A13BF46-B8C5-48AA-8308-C9ECFF431A18}"/>
-              </a:ext>
-            </a:extLst>
-          </p:cNvPr>
-          <p:cNvSpPr txBox="1"/>
-          <p:nvPr/>
-        </p:nvSpPr>
-        <p:spPr>
-          <a:xfrm>
-            <a:off x="567542" y="491954"/>
-            <a:ext cx="3877985" cy="584775"/>
-          </a:xfrm>
-          <a:prstGeom prst="rect">
-            <a:avLst/>
-          </a:prstGeom>
-          <a:noFill/>
-        </p:spPr>
-        <p:txBody>
-          <a:bodyPr wrap="none" rtlCol="0">
-            <a:spAutoFit/>
-          </a:bodyPr>
-          <a:lstStyle/>
-          <a:p>
-            <a:r>
-              <a:rPr kumimoji="1" lang="ja-JP" altLang="en-US" sz="3200" b="1" u="sng" dirty="0"/>
-              <a:t>トゥーンシェーダー</a:t>
-            </a:r>
-            <a:endParaRPr kumimoji="1" lang="en-US" altLang="ja-JP" sz="3200" b="1" u="sng" dirty="0"/>
-          </a:p>
-        </p:txBody>
-      </p:sp>
-      <p:sp>
-        <p:nvSpPr>
-          <p:cNvPr id="6" name="テキスト ボックス 5">
-            <a:extLst>
-              <a:ext uri="{FF2B5EF4-FFF2-40B4-BE49-F238E27FC236}">
-                <a16:creationId xmlns:a16="http://schemas.microsoft.com/office/drawing/2014/main" id="{55830AD6-028B-4C4E-80BF-B70DFC1C3A46}"/>
-              </a:ext>
-            </a:extLst>
-          </p:cNvPr>
-          <p:cNvSpPr txBox="1"/>
-          <p:nvPr/>
-        </p:nvSpPr>
-        <p:spPr>
-          <a:xfrm>
-            <a:off x="567542" y="1216429"/>
-            <a:ext cx="4456669" cy="461665"/>
-          </a:xfrm>
-          <a:prstGeom prst="rect">
-            <a:avLst/>
-          </a:prstGeom>
-          <a:noFill/>
-        </p:spPr>
-        <p:txBody>
-          <a:bodyPr wrap="none" rtlCol="0">
-            <a:spAutoFit/>
-          </a:bodyPr>
-          <a:lstStyle/>
-          <a:p>
-            <a:r>
-              <a:rPr kumimoji="1" lang="en-US" altLang="ja-JP" sz="2400" b="1" dirty="0" err="1">
-                <a:solidFill>
-                  <a:srgbClr val="FF0000"/>
-                </a:solidFill>
-              </a:rPr>
-              <a:t>RampToon.shader</a:t>
-            </a:r>
-            <a:r>
-              <a:rPr kumimoji="1" lang="ja-JP" altLang="en-US" sz="2400" dirty="0"/>
-              <a:t>（その３）</a:t>
-            </a:r>
-            <a:endParaRPr kumimoji="1" lang="en-US" altLang="ja-JP" sz="2400" dirty="0"/>
-          </a:p>
-        </p:txBody>
-      </p:sp>
-      <p:pic>
-        <p:nvPicPr>
-          <p:cNvPr id="3" name="図 2">
-            <a:extLst>
-              <a:ext uri="{FF2B5EF4-FFF2-40B4-BE49-F238E27FC236}">
-                <a16:creationId xmlns:a16="http://schemas.microsoft.com/office/drawing/2014/main" id="{CFFB6F4D-7D1B-4445-92D7-396D6D8802A6}"/>
-              </a:ext>
-            </a:extLst>
-          </p:cNvPr>
-          <p:cNvPicPr>
-            <a:picLocks noChangeAspect="1"/>
-          </p:cNvPicPr>
-          <p:nvPr/>
-        </p:nvPicPr>
-        <p:blipFill>
-          <a:blip r:embed="rId2"/>
-          <a:stretch>
-            <a:fillRect/>
-          </a:stretch>
-        </p:blipFill>
-        <p:spPr>
-          <a:xfrm>
-            <a:off x="567542" y="1817794"/>
-            <a:ext cx="9830731" cy="3417594"/>
-          </a:xfrm>
-          <a:prstGeom prst="rect">
-            <a:avLst/>
-          </a:prstGeom>
-        </p:spPr>
-      </p:pic>
-    </p:spTree>
-    <p:extLst>
-      <p:ext uri="{BB962C8B-B14F-4D97-AF65-F5344CB8AC3E}">
-        <p14:creationId xmlns:p14="http://schemas.microsoft.com/office/powerpoint/2010/main" val="2323726097"/>
-      </p:ext>
-    </p:extLst>
-  </p:cSld>
-  <p:clrMapOvr>
-    <a:masterClrMapping/>
-  </p:clrMapOvr>
-</p:sld>
-</file>
-
-<file path=ppt/slides/slide6.xml><?xml version="1.0" encoding="utf-8"?>
-<p:sld xmlns:a="http://schemas.openxmlformats.org/drawingml/2006/main" xmlns:r="http://schemas.openxmlformats.org/officeDocument/2006/relationships" xmlns:p="http://schemas.openxmlformats.org/presentationml/2006/main">
-  <p:cSld>
-    <p:spTree>
-      <p:nvGrpSpPr>
-        <p:cNvPr id="1" name=""/>
-        <p:cNvGrpSpPr/>
-        <p:nvPr/>
-      </p:nvGrpSpPr>
-      <p:grpSpPr>
-        <a:xfrm>
-          <a:off x="0" y="0"/>
-          <a:ext cx="0" cy="0"/>
-          <a:chOff x="0" y="0"/>
-          <a:chExt cx="0" cy="0"/>
-        </a:xfrm>
-      </p:grpSpPr>
-      <p:sp>
-        <p:nvSpPr>
-          <p:cNvPr id="4" name="テキスト ボックス 3">
-            <a:extLst>
-              <a:ext uri="{FF2B5EF4-FFF2-40B4-BE49-F238E27FC236}">
-                <a16:creationId xmlns:a16="http://schemas.microsoft.com/office/drawing/2014/main" id="{5A13BF46-B8C5-48AA-8308-C9ECFF431A18}"/>
-              </a:ext>
-            </a:extLst>
-          </p:cNvPr>
-          <p:cNvSpPr txBox="1"/>
-          <p:nvPr/>
-        </p:nvSpPr>
-        <p:spPr>
-          <a:xfrm>
-            <a:off x="567542" y="491954"/>
-            <a:ext cx="3877985" cy="584775"/>
-          </a:xfrm>
-          <a:prstGeom prst="rect">
-            <a:avLst/>
-          </a:prstGeom>
-          <a:noFill/>
-        </p:spPr>
-        <p:txBody>
-          <a:bodyPr wrap="none" rtlCol="0">
-            <a:spAutoFit/>
-          </a:bodyPr>
-          <a:lstStyle/>
-          <a:p>
-            <a:r>
-              <a:rPr kumimoji="1" lang="ja-JP" altLang="en-US" sz="3200" b="1" u="sng" dirty="0"/>
-              <a:t>トゥーンシェーダー</a:t>
-            </a:r>
-            <a:endParaRPr kumimoji="1" lang="en-US" altLang="ja-JP" sz="3200" b="1" u="sng" dirty="0"/>
-          </a:p>
-        </p:txBody>
-      </p:sp>
-      <p:sp>
-        <p:nvSpPr>
-          <p:cNvPr id="6" name="テキスト ボックス 5">
-            <a:extLst>
-              <a:ext uri="{FF2B5EF4-FFF2-40B4-BE49-F238E27FC236}">
-                <a16:creationId xmlns:a16="http://schemas.microsoft.com/office/drawing/2014/main" id="{55830AD6-028B-4C4E-80BF-B70DFC1C3A46}"/>
-              </a:ext>
-            </a:extLst>
-          </p:cNvPr>
-          <p:cNvSpPr txBox="1"/>
-          <p:nvPr/>
-        </p:nvSpPr>
-        <p:spPr>
-          <a:xfrm>
-            <a:off x="567542" y="1216429"/>
-            <a:ext cx="4456669" cy="461665"/>
-          </a:xfrm>
-          <a:prstGeom prst="rect">
-            <a:avLst/>
-          </a:prstGeom>
-          <a:noFill/>
-        </p:spPr>
-        <p:txBody>
-          <a:bodyPr wrap="none" rtlCol="0">
-            <a:spAutoFit/>
-          </a:bodyPr>
-          <a:lstStyle/>
-          <a:p>
-            <a:r>
-              <a:rPr kumimoji="1" lang="en-US" altLang="ja-JP" sz="2400" b="1" dirty="0" err="1">
-                <a:solidFill>
-                  <a:srgbClr val="FF0000"/>
-                </a:solidFill>
-              </a:rPr>
-              <a:t>RampToon.shader</a:t>
-            </a:r>
-            <a:r>
-              <a:rPr kumimoji="1" lang="ja-JP" altLang="en-US" sz="2400" dirty="0"/>
-              <a:t>（その４）</a:t>
-            </a:r>
-            <a:endParaRPr kumimoji="1" lang="en-US" altLang="ja-JP" sz="2400" dirty="0"/>
-          </a:p>
-        </p:txBody>
-      </p:sp>
-      <p:pic>
-        <p:nvPicPr>
-          <p:cNvPr id="5" name="図 4">
-            <a:extLst>
-              <a:ext uri="{FF2B5EF4-FFF2-40B4-BE49-F238E27FC236}">
-                <a16:creationId xmlns:a16="http://schemas.microsoft.com/office/drawing/2014/main" id="{1E439916-E02D-405F-A139-A30B2B945E64}"/>
-              </a:ext>
-            </a:extLst>
-          </p:cNvPr>
-          <p:cNvPicPr>
-            <a:picLocks noChangeAspect="1"/>
-          </p:cNvPicPr>
-          <p:nvPr/>
-        </p:nvPicPr>
-        <p:blipFill>
-          <a:blip r:embed="rId2"/>
-          <a:stretch>
-            <a:fillRect/>
-          </a:stretch>
-        </p:blipFill>
-        <p:spPr>
-          <a:xfrm>
-            <a:off x="567542" y="1817794"/>
-            <a:ext cx="9935962" cy="4753638"/>
-          </a:xfrm>
-          <a:prstGeom prst="rect">
-            <a:avLst/>
-          </a:prstGeom>
-        </p:spPr>
-      </p:pic>
-    </p:spTree>
-    <p:extLst>
-      <p:ext uri="{BB962C8B-B14F-4D97-AF65-F5344CB8AC3E}">
-        <p14:creationId xmlns:p14="http://schemas.microsoft.com/office/powerpoint/2010/main" val="1220442227"/>
-      </p:ext>
-    </p:extLst>
-  </p:cSld>
-  <p:clrMapOvr>
-    <a:masterClrMapping/>
-  </p:clrMapOvr>
-</p:sld>
-</file>
-
-<file path=ppt/slides/slide7.xml><?xml version="1.0" encoding="utf-8"?>
-<p:sld xmlns:a="http://schemas.openxmlformats.org/drawingml/2006/main" xmlns:r="http://schemas.openxmlformats.org/officeDocument/2006/relationships" xmlns:p="http://schemas.openxmlformats.org/presentationml/2006/main">
-  <p:cSld>
-    <p:spTree>
-      <p:nvGrpSpPr>
-        <p:cNvPr id="1" name=""/>
-        <p:cNvGrpSpPr/>
-        <p:nvPr/>
-      </p:nvGrpSpPr>
-      <p:grpSpPr>
-        <a:xfrm>
-          <a:off x="0" y="0"/>
-          <a:ext cx="0" cy="0"/>
-          <a:chOff x="0" y="0"/>
-          <a:chExt cx="0" cy="0"/>
-        </a:xfrm>
-      </p:grpSpPr>
-      <p:sp>
-        <p:nvSpPr>
-          <p:cNvPr id="4" name="テキスト ボックス 3">
-            <a:extLst>
-              <a:ext uri="{FF2B5EF4-FFF2-40B4-BE49-F238E27FC236}">
-                <a16:creationId xmlns:a16="http://schemas.microsoft.com/office/drawing/2014/main" id="{5A13BF46-B8C5-48AA-8308-C9ECFF431A18}"/>
-              </a:ext>
-            </a:extLst>
-          </p:cNvPr>
-          <p:cNvSpPr txBox="1"/>
-          <p:nvPr/>
-        </p:nvSpPr>
-        <p:spPr>
-          <a:xfrm>
-            <a:off x="567542" y="491954"/>
-            <a:ext cx="3877985" cy="584775"/>
-          </a:xfrm>
-          <a:prstGeom prst="rect">
-            <a:avLst/>
-          </a:prstGeom>
-          <a:noFill/>
-        </p:spPr>
-        <p:txBody>
-          <a:bodyPr wrap="none" rtlCol="0">
-            <a:spAutoFit/>
-          </a:bodyPr>
-          <a:lstStyle/>
-          <a:p>
-            <a:r>
-              <a:rPr kumimoji="1" lang="ja-JP" altLang="en-US" sz="3200" b="1" u="sng" dirty="0"/>
-              <a:t>トゥーンシェーダー</a:t>
-            </a:r>
-            <a:endParaRPr kumimoji="1" lang="en-US" altLang="ja-JP" sz="3200" b="1" u="sng" dirty="0"/>
-          </a:p>
-        </p:txBody>
-      </p:sp>
-      <p:sp>
-        <p:nvSpPr>
-          <p:cNvPr id="6" name="テキスト ボックス 5">
-            <a:extLst>
-              <a:ext uri="{FF2B5EF4-FFF2-40B4-BE49-F238E27FC236}">
-                <a16:creationId xmlns:a16="http://schemas.microsoft.com/office/drawing/2014/main" id="{55830AD6-028B-4C4E-80BF-B70DFC1C3A46}"/>
-              </a:ext>
-            </a:extLst>
-          </p:cNvPr>
-          <p:cNvSpPr txBox="1"/>
-          <p:nvPr/>
-        </p:nvSpPr>
-        <p:spPr>
-          <a:xfrm>
-            <a:off x="567542" y="1216429"/>
-            <a:ext cx="4801314" cy="461665"/>
-          </a:xfrm>
-          <a:prstGeom prst="rect">
-            <a:avLst/>
-          </a:prstGeom>
-          <a:noFill/>
-        </p:spPr>
-        <p:txBody>
-          <a:bodyPr wrap="none" rtlCol="0">
-            <a:spAutoFit/>
-          </a:bodyPr>
-          <a:lstStyle/>
-          <a:p>
-            <a:r>
-              <a:rPr kumimoji="1" lang="ja-JP" altLang="en-US" sz="2400" dirty="0"/>
-              <a:t>球やカプセルに適用しましょう。</a:t>
-            </a:r>
-            <a:endParaRPr kumimoji="1" lang="en-US" altLang="ja-JP" sz="2400" dirty="0"/>
-          </a:p>
-        </p:txBody>
-      </p:sp>
-      <p:pic>
-        <p:nvPicPr>
-          <p:cNvPr id="7" name="図 6">
-            <a:extLst>
-              <a:ext uri="{FF2B5EF4-FFF2-40B4-BE49-F238E27FC236}">
-                <a16:creationId xmlns:a16="http://schemas.microsoft.com/office/drawing/2014/main" id="{1DA6246C-1D19-43BF-9258-36245AD1F932}"/>
-              </a:ext>
-            </a:extLst>
-          </p:cNvPr>
-          <p:cNvPicPr>
-            <a:picLocks noChangeAspect="1"/>
-          </p:cNvPicPr>
-          <p:nvPr/>
-        </p:nvPicPr>
-        <p:blipFill>
-          <a:blip r:embed="rId2"/>
-          <a:stretch>
-            <a:fillRect/>
-          </a:stretch>
-        </p:blipFill>
-        <p:spPr>
-          <a:xfrm>
-            <a:off x="567542" y="1817794"/>
-            <a:ext cx="4324943" cy="3243707"/>
-          </a:xfrm>
-          <a:prstGeom prst="rect">
-            <a:avLst/>
-          </a:prstGeom>
-        </p:spPr>
-      </p:pic>
-      <p:pic>
-        <p:nvPicPr>
-          <p:cNvPr id="3" name="図 2">
-            <a:extLst>
-              <a:ext uri="{FF2B5EF4-FFF2-40B4-BE49-F238E27FC236}">
-                <a16:creationId xmlns:a16="http://schemas.microsoft.com/office/drawing/2014/main" id="{9A7E52F8-F3CC-4A7B-B702-4A704463E82F}"/>
-              </a:ext>
-            </a:extLst>
-          </p:cNvPr>
-          <p:cNvPicPr>
-            <a:picLocks noChangeAspect="1"/>
-          </p:cNvPicPr>
-          <p:nvPr/>
-        </p:nvPicPr>
-        <p:blipFill>
-          <a:blip r:embed="rId3"/>
-          <a:stretch>
-            <a:fillRect/>
-          </a:stretch>
-        </p:blipFill>
-        <p:spPr>
-          <a:xfrm>
-            <a:off x="5163238" y="1817794"/>
-            <a:ext cx="4785559" cy="3243707"/>
-          </a:xfrm>
-          <a:prstGeom prst="rect">
-            <a:avLst/>
-          </a:prstGeom>
-        </p:spPr>
-      </p:pic>
-    </p:spTree>
-    <p:extLst>
-      <p:ext uri="{BB962C8B-B14F-4D97-AF65-F5344CB8AC3E}">
-        <p14:creationId xmlns:p14="http://schemas.microsoft.com/office/powerpoint/2010/main" val="3113049352"/>
-      </p:ext>
-    </p:extLst>
-  </p:cSld>
-  <p:clrMapOvr>
-    <a:masterClrMapping/>
-  </p:clrMapOvr>
-</p:sld>
-</file>
-
-<file path=ppt/slides/slide8.xml><?xml version="1.0" encoding="utf-8"?>
-<p:sld xmlns:a="http://schemas.openxmlformats.org/drawingml/2006/main" xmlns:r="http://schemas.openxmlformats.org/officeDocument/2006/relationships" xmlns:p="http://schemas.openxmlformats.org/presentationml/2006/main">
-  <p:cSld>
-    <p:spTree>
-      <p:nvGrpSpPr>
-        <p:cNvPr id="1" name=""/>
-        <p:cNvGrpSpPr/>
-        <p:nvPr/>
-      </p:nvGrpSpPr>
-      <p:grpSpPr>
-        <a:xfrm>
-          <a:off x="0" y="0"/>
-          <a:ext cx="0" cy="0"/>
-          <a:chOff x="0" y="0"/>
-          <a:chExt cx="0" cy="0"/>
-        </a:xfrm>
-      </p:grpSpPr>
-      <p:sp>
-        <p:nvSpPr>
-          <p:cNvPr id="4" name="テキスト ボックス 3">
-            <a:extLst>
-              <a:ext uri="{FF2B5EF4-FFF2-40B4-BE49-F238E27FC236}">
-                <a16:creationId xmlns:a16="http://schemas.microsoft.com/office/drawing/2014/main" id="{5A13BF46-B8C5-48AA-8308-C9ECFF431A18}"/>
-              </a:ext>
-            </a:extLst>
-          </p:cNvPr>
-          <p:cNvSpPr txBox="1"/>
-          <p:nvPr/>
-        </p:nvSpPr>
-        <p:spPr>
-          <a:xfrm>
-            <a:off x="567542" y="491954"/>
-            <a:ext cx="3877985" cy="584775"/>
-          </a:xfrm>
-          <a:prstGeom prst="rect">
-            <a:avLst/>
-          </a:prstGeom>
-          <a:noFill/>
-        </p:spPr>
-        <p:txBody>
-          <a:bodyPr wrap="none" rtlCol="0">
-            <a:spAutoFit/>
-          </a:bodyPr>
-          <a:lstStyle/>
-          <a:p>
-            <a:r>
-              <a:rPr kumimoji="1" lang="ja-JP" altLang="en-US" sz="3200" b="1" u="sng" dirty="0"/>
-              <a:t>トゥーンシェーダー</a:t>
-            </a:r>
-            <a:endParaRPr kumimoji="1" lang="en-US" altLang="ja-JP" sz="3200" b="1" u="sng" dirty="0"/>
-          </a:p>
-        </p:txBody>
-      </p:sp>
-      <p:sp>
-        <p:nvSpPr>
-          <p:cNvPr id="6" name="テキスト ボックス 5">
-            <a:extLst>
-              <a:ext uri="{FF2B5EF4-FFF2-40B4-BE49-F238E27FC236}">
-                <a16:creationId xmlns:a16="http://schemas.microsoft.com/office/drawing/2014/main" id="{55830AD6-028B-4C4E-80BF-B70DFC1C3A46}"/>
-              </a:ext>
-            </a:extLst>
-          </p:cNvPr>
-          <p:cNvSpPr txBox="1"/>
-          <p:nvPr/>
-        </p:nvSpPr>
-        <p:spPr>
-          <a:xfrm>
-            <a:off x="567542" y="1216429"/>
-            <a:ext cx="8494633" cy="830997"/>
-          </a:xfrm>
-          <a:prstGeom prst="rect">
-            <a:avLst/>
-          </a:prstGeom>
-          <a:noFill/>
-        </p:spPr>
-        <p:txBody>
-          <a:bodyPr wrap="none" rtlCol="0">
-            <a:spAutoFit/>
-          </a:bodyPr>
-          <a:lstStyle/>
-          <a:p>
-            <a:r>
-              <a:rPr kumimoji="1" lang="ja-JP" altLang="en-US" sz="2400" dirty="0"/>
-              <a:t>光の当たり具合から</a:t>
-            </a:r>
-            <a:r>
-              <a:rPr lang="ja-JP" altLang="en-US" sz="2400" dirty="0"/>
-              <a:t>テクスチャ座標を計算することにより、</a:t>
-            </a:r>
-            <a:endParaRPr lang="en-US" altLang="ja-JP" sz="2400" dirty="0"/>
-          </a:p>
-          <a:p>
-            <a:r>
-              <a:rPr kumimoji="1" lang="en-US" altLang="ja-JP" sz="2400" dirty="0"/>
-              <a:t>Ramp</a:t>
-            </a:r>
-            <a:r>
-              <a:rPr kumimoji="1" lang="ja-JP" altLang="en-US" sz="2400" dirty="0"/>
-              <a:t>テクスチャに沿った明るさで描画されます。</a:t>
-            </a:r>
-            <a:endParaRPr kumimoji="1" lang="en-US" altLang="ja-JP" sz="2400" dirty="0"/>
-          </a:p>
-        </p:txBody>
-      </p:sp>
-      <p:grpSp>
-        <p:nvGrpSpPr>
-          <p:cNvPr id="8" name="グループ化 7">
-            <a:extLst>
-              <a:ext uri="{FF2B5EF4-FFF2-40B4-BE49-F238E27FC236}">
-                <a16:creationId xmlns:a16="http://schemas.microsoft.com/office/drawing/2014/main" id="{87EBFA63-AD9C-4682-B30C-07273A04FED4}"/>
-              </a:ext>
-            </a:extLst>
-          </p:cNvPr>
-          <p:cNvGrpSpPr/>
-          <p:nvPr/>
-        </p:nvGrpSpPr>
-        <p:grpSpPr>
-          <a:xfrm>
-            <a:off x="567542" y="4624103"/>
-            <a:ext cx="8101329" cy="252724"/>
-            <a:chOff x="567542" y="2556458"/>
-            <a:chExt cx="10408023" cy="779931"/>
-          </a:xfrm>
-        </p:grpSpPr>
-        <p:sp>
-          <p:nvSpPr>
-            <p:cNvPr id="9" name="正方形/長方形 8">
-              <a:extLst>
-                <a:ext uri="{FF2B5EF4-FFF2-40B4-BE49-F238E27FC236}">
-                  <a16:creationId xmlns:a16="http://schemas.microsoft.com/office/drawing/2014/main" id="{DCD81C56-531B-48AD-BC68-E76EDD2EDEE8}"/>
-                </a:ext>
-              </a:extLst>
-            </p:cNvPr>
-            <p:cNvSpPr/>
-            <p:nvPr/>
-          </p:nvSpPr>
-          <p:spPr>
-            <a:xfrm>
-              <a:off x="567542" y="2556460"/>
-              <a:ext cx="3469341" cy="779929"/>
-            </a:xfrm>
-            <a:prstGeom prst="rect">
-              <a:avLst/>
-            </a:prstGeom>
-            <a:solidFill>
-              <a:schemeClr val="tx1"/>
-            </a:solidFill>
-            <a:ln>
-              <a:noFill/>
-            </a:ln>
-          </p:spPr>
-          <p:style>
-            <a:lnRef idx="2">
-              <a:schemeClr val="accent1">
-                <a:shade val="50000"/>
-              </a:schemeClr>
-            </a:lnRef>
-            <a:fillRef idx="1">
-              <a:schemeClr val="accent1"/>
-            </a:fillRef>
-            <a:effectRef idx="0">
-              <a:schemeClr val="accent1"/>
-            </a:effectRef>
-            <a:fontRef idx="minor">
-              <a:schemeClr val="lt1"/>
-            </a:fontRef>
-          </p:style>
-          <p:txBody>
-            <a:bodyPr rtlCol="0" anchor="ctr"/>
-            <a:lstStyle/>
-            <a:p>
-              <a:pPr algn="ctr"/>
-              <a:endParaRPr kumimoji="1" lang="ja-JP" altLang="en-US"/>
-            </a:p>
-          </p:txBody>
-        </p:sp>
-        <p:sp>
-          <p:nvSpPr>
-            <p:cNvPr id="10" name="正方形/長方形 9">
-              <a:extLst>
-                <a:ext uri="{FF2B5EF4-FFF2-40B4-BE49-F238E27FC236}">
-                  <a16:creationId xmlns:a16="http://schemas.microsoft.com/office/drawing/2014/main" id="{4FFC377F-3BFE-4969-8480-20C99AD67CA7}"/>
-                </a:ext>
-              </a:extLst>
-            </p:cNvPr>
-            <p:cNvSpPr/>
-            <p:nvPr/>
-          </p:nvSpPr>
-          <p:spPr>
-            <a:xfrm>
-              <a:off x="4036883" y="2556459"/>
-              <a:ext cx="3469341" cy="779929"/>
-            </a:xfrm>
-            <a:prstGeom prst="rect">
-              <a:avLst/>
-            </a:prstGeom>
-            <a:solidFill>
-              <a:schemeClr val="bg1">
-                <a:lumMod val="75000"/>
-              </a:schemeClr>
-            </a:solidFill>
-            <a:ln>
-              <a:noFill/>
-            </a:ln>
-          </p:spPr>
-          <p:style>
-            <a:lnRef idx="2">
-              <a:schemeClr val="accent1">
-                <a:shade val="50000"/>
-              </a:schemeClr>
-            </a:lnRef>
-            <a:fillRef idx="1">
-              <a:schemeClr val="accent1"/>
-            </a:fillRef>
-            <a:effectRef idx="0">
-              <a:schemeClr val="accent1"/>
-            </a:effectRef>
-            <a:fontRef idx="minor">
-              <a:schemeClr val="lt1"/>
-            </a:fontRef>
-          </p:style>
-          <p:txBody>
-            <a:bodyPr rtlCol="0" anchor="ctr"/>
-            <a:lstStyle/>
-            <a:p>
-              <a:pPr algn="ctr"/>
-              <a:endParaRPr kumimoji="1" lang="ja-JP" altLang="en-US"/>
-            </a:p>
-          </p:txBody>
-        </p:sp>
-        <p:sp>
-          <p:nvSpPr>
-            <p:cNvPr id="11" name="正方形/長方形 10">
-              <a:extLst>
-                <a:ext uri="{FF2B5EF4-FFF2-40B4-BE49-F238E27FC236}">
-                  <a16:creationId xmlns:a16="http://schemas.microsoft.com/office/drawing/2014/main" id="{4858F45A-11A3-46C0-9886-CB51D38F9907}"/>
-                </a:ext>
-              </a:extLst>
-            </p:cNvPr>
-            <p:cNvSpPr/>
-            <p:nvPr/>
-          </p:nvSpPr>
-          <p:spPr>
-            <a:xfrm>
-              <a:off x="7506224" y="2556458"/>
-              <a:ext cx="3469341" cy="779929"/>
-            </a:xfrm>
-            <a:prstGeom prst="rect">
-              <a:avLst/>
-            </a:prstGeom>
-            <a:solidFill>
-              <a:schemeClr val="bg1">
-                <a:lumMod val="95000"/>
-              </a:schemeClr>
-            </a:solidFill>
-            <a:ln>
-              <a:noFill/>
-            </a:ln>
-          </p:spPr>
-          <p:style>
-            <a:lnRef idx="2">
-              <a:schemeClr val="accent1">
-                <a:shade val="50000"/>
-              </a:schemeClr>
-            </a:lnRef>
-            <a:fillRef idx="1">
-              <a:schemeClr val="accent1"/>
-            </a:fillRef>
-            <a:effectRef idx="0">
-              <a:schemeClr val="accent1"/>
-            </a:effectRef>
-            <a:fontRef idx="minor">
-              <a:schemeClr val="lt1"/>
-            </a:fontRef>
-          </p:style>
-          <p:txBody>
-            <a:bodyPr rtlCol="0" anchor="ctr"/>
-            <a:lstStyle/>
-            <a:p>
-              <a:pPr algn="ctr"/>
-              <a:endParaRPr kumimoji="1" lang="ja-JP" altLang="en-US"/>
-            </a:p>
-          </p:txBody>
-        </p:sp>
-      </p:grpSp>
-      <p:pic>
-        <p:nvPicPr>
-          <p:cNvPr id="5" name="図 4">
-            <a:extLst>
-              <a:ext uri="{FF2B5EF4-FFF2-40B4-BE49-F238E27FC236}">
-                <a16:creationId xmlns:a16="http://schemas.microsoft.com/office/drawing/2014/main" id="{1153A278-3C7C-4A8F-9BC1-B63877027543}"/>
-              </a:ext>
-            </a:extLst>
-          </p:cNvPr>
-          <p:cNvPicPr>
-            <a:picLocks noChangeAspect="1"/>
-          </p:cNvPicPr>
-          <p:nvPr/>
-        </p:nvPicPr>
-        <p:blipFill>
-          <a:blip r:embed="rId2"/>
-          <a:stretch>
-            <a:fillRect/>
-          </a:stretch>
-        </p:blipFill>
-        <p:spPr>
-          <a:xfrm>
-            <a:off x="567542" y="2187126"/>
-            <a:ext cx="7201905" cy="2133898"/>
-          </a:xfrm>
-          <a:prstGeom prst="rect">
-            <a:avLst/>
-          </a:prstGeom>
-        </p:spPr>
-      </p:pic>
-      <p:sp>
-        <p:nvSpPr>
-          <p:cNvPr id="12" name="テキスト ボックス 11">
-            <a:extLst>
-              <a:ext uri="{FF2B5EF4-FFF2-40B4-BE49-F238E27FC236}">
-                <a16:creationId xmlns:a16="http://schemas.microsoft.com/office/drawing/2014/main" id="{1588D44D-B62B-4A04-8AA5-278E2DDAE87E}"/>
-              </a:ext>
-            </a:extLst>
-          </p:cNvPr>
-          <p:cNvSpPr txBox="1"/>
-          <p:nvPr/>
-        </p:nvSpPr>
-        <p:spPr>
-          <a:xfrm>
-            <a:off x="0" y="4949074"/>
-            <a:ext cx="2031325" cy="830997"/>
-          </a:xfrm>
-          <a:prstGeom prst="rect">
-            <a:avLst/>
-          </a:prstGeom>
-          <a:noFill/>
-        </p:spPr>
-        <p:txBody>
-          <a:bodyPr wrap="none" rtlCol="0">
-            <a:spAutoFit/>
-          </a:bodyPr>
-          <a:lstStyle/>
-          <a:p>
-            <a:pPr algn="ctr"/>
-            <a:r>
-              <a:rPr kumimoji="1" lang="ja-JP" altLang="en-US" sz="2400" dirty="0"/>
-              <a:t>当たってない</a:t>
-            </a:r>
-            <a:endParaRPr kumimoji="1" lang="en-US" altLang="ja-JP" sz="2400" dirty="0"/>
-          </a:p>
-          <a:p>
-            <a:pPr algn="ctr"/>
-            <a:r>
-              <a:rPr lang="en-US" altLang="ja-JP" sz="2400" dirty="0"/>
-              <a:t>(dot=0)</a:t>
-            </a:r>
-          </a:p>
-        </p:txBody>
-      </p:sp>
-      <p:sp>
-        <p:nvSpPr>
-          <p:cNvPr id="13" name="テキスト ボックス 12">
-            <a:extLst>
-              <a:ext uri="{FF2B5EF4-FFF2-40B4-BE49-F238E27FC236}">
-                <a16:creationId xmlns:a16="http://schemas.microsoft.com/office/drawing/2014/main" id="{6A04A561-A643-48E9-9A5D-3FD7792C79CF}"/>
-              </a:ext>
-            </a:extLst>
-          </p:cNvPr>
-          <p:cNvSpPr txBox="1"/>
-          <p:nvPr/>
-        </p:nvSpPr>
-        <p:spPr>
-          <a:xfrm>
-            <a:off x="7906871" y="4922727"/>
-            <a:ext cx="1723549" cy="830997"/>
-          </a:xfrm>
-          <a:prstGeom prst="rect">
-            <a:avLst/>
-          </a:prstGeom>
-          <a:noFill/>
-        </p:spPr>
-        <p:txBody>
-          <a:bodyPr wrap="none" rtlCol="0">
-            <a:spAutoFit/>
-          </a:bodyPr>
-          <a:lstStyle/>
-          <a:p>
-            <a:pPr algn="ctr"/>
-            <a:r>
-              <a:rPr kumimoji="1" lang="ja-JP" altLang="en-US" sz="2400" dirty="0"/>
-              <a:t>当たってる</a:t>
-            </a:r>
-            <a:endParaRPr kumimoji="1" lang="en-US" altLang="ja-JP" sz="2400" dirty="0"/>
-          </a:p>
-          <a:p>
-            <a:pPr algn="ctr"/>
-            <a:r>
-              <a:rPr lang="en-US" altLang="ja-JP" sz="2400" dirty="0"/>
-              <a:t>(dot=1)</a:t>
-            </a:r>
-            <a:endParaRPr kumimoji="1" lang="en-US" altLang="ja-JP" sz="2400" dirty="0"/>
-          </a:p>
-        </p:txBody>
-      </p:sp>
-    </p:spTree>
-    <p:extLst>
-      <p:ext uri="{BB962C8B-B14F-4D97-AF65-F5344CB8AC3E}">
-        <p14:creationId xmlns:p14="http://schemas.microsoft.com/office/powerpoint/2010/main" val="1095114792"/>
+        <p14:creationId xmlns:p14="http://schemas.microsoft.com/office/powerpoint/2010/main" val="4070285603"/>
       </p:ext>
     </p:extLst>
   </p:cSld>
@@ -5419,7 +5759,7 @@
         <p:spPr>
           <a:xfrm>
             <a:off x="567542" y="491954"/>
-            <a:ext cx="3877985" cy="584775"/>
+            <a:ext cx="2646878" cy="584775"/>
           </a:xfrm>
           <a:prstGeom prst="rect">
             <a:avLst/>
@@ -5434,7 +5774,7 @@
           <a:p>
             <a:r>
               <a:rPr kumimoji="1" lang="ja-JP" altLang="en-US" sz="3200" b="1" u="sng" dirty="0"/>
-              <a:t>トゥーンシェーダー</a:t>
+              <a:t>アウトライン</a:t>
             </a:r>
             <a:endParaRPr kumimoji="1" lang="en-US" altLang="ja-JP" sz="3200" b="1" u="sng" dirty="0"/>
           </a:p>
@@ -5455,7 +5795,7 @@
         <p:spPr>
           <a:xfrm>
             <a:off x="567542" y="1216429"/>
-            <a:ext cx="9929321" cy="1200329"/>
+            <a:ext cx="7515199" cy="461665"/>
           </a:xfrm>
           <a:prstGeom prst="rect">
             <a:avLst/>
@@ -5469,8 +5809,16 @@
           <a:lstStyle/>
           <a:p>
             <a:r>
+              <a:rPr kumimoji="1" lang="en-US" altLang="ja-JP" sz="2400" b="1" dirty="0">
+                <a:solidFill>
+                  <a:srgbClr val="00B050"/>
+                </a:solidFill>
+              </a:rPr>
+              <a:t>Cull Front</a:t>
+            </a:r>
+            <a:r>
               <a:rPr kumimoji="1" lang="ja-JP" altLang="en-US" sz="2400" dirty="0"/>
-              <a:t>これにより</a:t>
+              <a:t>と書くと、</a:t>
             </a:r>
             <a:r>
               <a:rPr kumimoji="1" lang="ja-JP" altLang="en-US" sz="2400" b="1" dirty="0">
@@ -5478,23 +5826,7 @@
                   <a:srgbClr val="FF0000"/>
                 </a:solidFill>
               </a:rPr>
-              <a:t>影の段階数や幅はすべて</a:t>
-            </a:r>
-            <a:r>
-              <a:rPr kumimoji="1" lang="en-US" altLang="ja-JP" sz="2400" b="1" dirty="0">
-                <a:solidFill>
-                  <a:srgbClr val="FF0000"/>
-                </a:solidFill>
-              </a:rPr>
-              <a:t>Ramp</a:t>
-            </a:r>
-            <a:r>
-              <a:rPr kumimoji="1" lang="ja-JP" altLang="en-US" sz="2400" b="1" dirty="0">
-                <a:solidFill>
-                  <a:srgbClr val="FF0000"/>
-                </a:solidFill>
-              </a:rPr>
-              <a:t>テクスチャに委ねられます。</a:t>
+              <a:t>表面の描画をしなくなります。</a:t>
             </a:r>
             <a:endParaRPr kumimoji="1" lang="en-US" altLang="ja-JP" sz="2400" b="1" dirty="0">
               <a:solidFill>
@@ -5502,36 +5834,14 @@
               </a:solidFill>
             </a:endParaRPr>
           </a:p>
-          <a:p>
-            <a:r>
-              <a:rPr kumimoji="1" lang="ja-JP" altLang="en-US" sz="2400" dirty="0"/>
-              <a:t>実際のプロジェクトではデザイナーが</a:t>
-            </a:r>
-            <a:r>
-              <a:rPr kumimoji="1" lang="en-US" altLang="ja-JP" sz="2400" dirty="0"/>
-              <a:t>Ramp</a:t>
-            </a:r>
-            <a:r>
-              <a:rPr kumimoji="1" lang="ja-JP" altLang="en-US" sz="2400" dirty="0"/>
-              <a:t>テクスチャを調整して、</a:t>
-            </a:r>
-            <a:endParaRPr kumimoji="1" lang="en-US" altLang="ja-JP" sz="2400" dirty="0"/>
-          </a:p>
-          <a:p>
-            <a:r>
-              <a:rPr kumimoji="1" lang="ja-JP" altLang="en-US" sz="2400" dirty="0"/>
-              <a:t>見た目を作りこむことも多いです。</a:t>
-            </a:r>
-            <a:endParaRPr kumimoji="1" lang="en-US" altLang="ja-JP" sz="2400" dirty="0"/>
-          </a:p>
         </p:txBody>
       </p:sp>
       <p:pic>
         <p:nvPicPr>
-          <p:cNvPr id="14" name="図 13">
-            <a:extLst>
-              <a:ext uri="{FF2B5EF4-FFF2-40B4-BE49-F238E27FC236}">
-                <a16:creationId xmlns:a16="http://schemas.microsoft.com/office/drawing/2014/main" id="{E2DB1497-12E2-4F17-8970-22308634C765}"/>
+          <p:cNvPr id="8" name="図 7">
+            <a:extLst>
+              <a:ext uri="{FF2B5EF4-FFF2-40B4-BE49-F238E27FC236}">
+                <a16:creationId xmlns:a16="http://schemas.microsoft.com/office/drawing/2014/main" id="{C7B0C1E6-7B5E-4E20-9500-013114B5E105}"/>
               </a:ext>
             </a:extLst>
           </p:cNvPr>
@@ -5548,8 +5858,8 @@
         </p:blipFill>
         <p:spPr>
           <a:xfrm>
-            <a:off x="567542" y="2556458"/>
-            <a:ext cx="5079451" cy="3809588"/>
+            <a:off x="567542" y="1817794"/>
+            <a:ext cx="9345329" cy="1438476"/>
           </a:xfrm>
           <a:prstGeom prst="rect">
             <a:avLst/>
@@ -5559,7 +5869,7 @@
     </p:spTree>
     <p:extLst>
       <p:ext uri="{BB962C8B-B14F-4D97-AF65-F5344CB8AC3E}">
-        <p14:creationId xmlns:p14="http://schemas.microsoft.com/office/powerpoint/2010/main" val="3933331400"/>
+        <p14:creationId xmlns:p14="http://schemas.microsoft.com/office/powerpoint/2010/main" val="3814729191"/>
       </p:ext>
     </p:extLst>
   </p:cSld>

--- a/ゲーム科2年/01_後期/ゲームプログラミング応用Ⅰ/09_複数Passでアウトライン.pptx
+++ b/ゲーム科2年/01_後期/ゲームプログラミング応用Ⅰ/09_複数Passでアウトライン.pptx
@@ -4983,19 +4983,39 @@
               <a:t>このように</a:t>
             </a:r>
             <a:r>
-              <a:rPr kumimoji="1" lang="en-US" altLang="ja-JP" sz="2400" dirty="0"/>
+              <a:rPr kumimoji="1" lang="en-US" altLang="ja-JP" sz="2400" b="1" dirty="0">
+                <a:solidFill>
+                  <a:srgbClr val="FF0000"/>
+                </a:solidFill>
+              </a:rPr>
               <a:t>Pass</a:t>
             </a:r>
             <a:r>
+              <a:rPr kumimoji="1" lang="ja-JP" altLang="en-US" sz="2400" b="1" dirty="0">
+                <a:solidFill>
+                  <a:srgbClr val="FF0000"/>
+                </a:solidFill>
+              </a:rPr>
+              <a:t>を複数用意して描画処理を分ける</a:t>
+            </a:r>
+            <a:r>
               <a:rPr kumimoji="1" lang="ja-JP" altLang="en-US" sz="2400" dirty="0"/>
-              <a:t>を複数用意して描画処理を分けることもできます。</a:t>
+              <a:t>こともできます。</a:t>
             </a:r>
             <a:endParaRPr kumimoji="1" lang="en-US" altLang="ja-JP" sz="2400" dirty="0"/>
           </a:p>
           <a:p>
             <a:r>
+              <a:rPr lang="ja-JP" altLang="en-US" sz="2400" b="1" dirty="0">
+                <a:solidFill>
+                  <a:srgbClr val="FF0000"/>
+                </a:solidFill>
+              </a:rPr>
+              <a:t>上から順に描画される</a:t>
+            </a:r>
+            <a:r>
               <a:rPr lang="ja-JP" altLang="en-US" sz="2400" dirty="0"/>
-              <a:t>上か順に描画されるので気を付けましょう。</a:t>
+              <a:t>ので気を付けましょう。</a:t>
             </a:r>
             <a:endParaRPr lang="en-US" altLang="ja-JP" sz="2400" dirty="0"/>
           </a:p>

--- a/ゲーム科2年/01_後期/ゲームプログラミング応用Ⅰ/09_複数Passでアウトライン.pptx
+++ b/ゲーム科2年/01_後期/ゲームプログラミング応用Ⅰ/09_複数Passでアウトライン.pptx
@@ -269,7 +269,7 @@
           <a:p>
             <a:fld id="{E9CC885B-4903-4D54-9A93-00025F12DED9}" type="datetimeFigureOut">
               <a:rPr kumimoji="1" lang="ja-JP" altLang="en-US" smtClean="0"/>
-              <a:t>2025/7/25</a:t>
+              <a:t>2025/7/28</a:t>
             </a:fld>
             <a:endParaRPr kumimoji="1" lang="ja-JP" altLang="en-US"/>
           </a:p>
@@ -499,7 +499,7 @@
           <a:p>
             <a:fld id="{E9CC885B-4903-4D54-9A93-00025F12DED9}" type="datetimeFigureOut">
               <a:rPr kumimoji="1" lang="ja-JP" altLang="en-US" smtClean="0"/>
-              <a:t>2025/7/25</a:t>
+              <a:t>2025/7/28</a:t>
             </a:fld>
             <a:endParaRPr kumimoji="1" lang="ja-JP" altLang="en-US"/>
           </a:p>
@@ -739,7 +739,7 @@
           <a:p>
             <a:fld id="{E9CC885B-4903-4D54-9A93-00025F12DED9}" type="datetimeFigureOut">
               <a:rPr kumimoji="1" lang="ja-JP" altLang="en-US" smtClean="0"/>
-              <a:t>2025/7/25</a:t>
+              <a:t>2025/7/28</a:t>
             </a:fld>
             <a:endParaRPr kumimoji="1" lang="ja-JP" altLang="en-US"/>
           </a:p>
@@ -969,7 +969,7 @@
           <a:p>
             <a:fld id="{E9CC885B-4903-4D54-9A93-00025F12DED9}" type="datetimeFigureOut">
               <a:rPr kumimoji="1" lang="ja-JP" altLang="en-US" smtClean="0"/>
-              <a:t>2025/7/25</a:t>
+              <a:t>2025/7/28</a:t>
             </a:fld>
             <a:endParaRPr kumimoji="1" lang="ja-JP" altLang="en-US"/>
           </a:p>
@@ -1244,7 +1244,7 @@
           <a:p>
             <a:fld id="{E9CC885B-4903-4D54-9A93-00025F12DED9}" type="datetimeFigureOut">
               <a:rPr kumimoji="1" lang="ja-JP" altLang="en-US" smtClean="0"/>
-              <a:t>2025/7/25</a:t>
+              <a:t>2025/7/28</a:t>
             </a:fld>
             <a:endParaRPr kumimoji="1" lang="ja-JP" altLang="en-US"/>
           </a:p>
@@ -1573,7 +1573,7 @@
           <a:p>
             <a:fld id="{E9CC885B-4903-4D54-9A93-00025F12DED9}" type="datetimeFigureOut">
               <a:rPr kumimoji="1" lang="ja-JP" altLang="en-US" smtClean="0"/>
-              <a:t>2025/7/25</a:t>
+              <a:t>2025/7/28</a:t>
             </a:fld>
             <a:endParaRPr kumimoji="1" lang="ja-JP" altLang="en-US"/>
           </a:p>
@@ -2049,7 +2049,7 @@
           <a:p>
             <a:fld id="{E9CC885B-4903-4D54-9A93-00025F12DED9}" type="datetimeFigureOut">
               <a:rPr kumimoji="1" lang="ja-JP" altLang="en-US" smtClean="0"/>
-              <a:t>2025/7/25</a:t>
+              <a:t>2025/7/28</a:t>
             </a:fld>
             <a:endParaRPr kumimoji="1" lang="ja-JP" altLang="en-US"/>
           </a:p>
@@ -2190,7 +2190,7 @@
           <a:p>
             <a:fld id="{E9CC885B-4903-4D54-9A93-00025F12DED9}" type="datetimeFigureOut">
               <a:rPr kumimoji="1" lang="ja-JP" altLang="en-US" smtClean="0"/>
-              <a:t>2025/7/25</a:t>
+              <a:t>2025/7/28</a:t>
             </a:fld>
             <a:endParaRPr kumimoji="1" lang="ja-JP" altLang="en-US"/>
           </a:p>
@@ -2303,7 +2303,7 @@
           <a:p>
             <a:fld id="{E9CC885B-4903-4D54-9A93-00025F12DED9}" type="datetimeFigureOut">
               <a:rPr kumimoji="1" lang="ja-JP" altLang="en-US" smtClean="0"/>
-              <a:t>2025/7/25</a:t>
+              <a:t>2025/7/28</a:t>
             </a:fld>
             <a:endParaRPr kumimoji="1" lang="ja-JP" altLang="en-US"/>
           </a:p>
@@ -2646,7 +2646,7 @@
           <a:p>
             <a:fld id="{E9CC885B-4903-4D54-9A93-00025F12DED9}" type="datetimeFigureOut">
               <a:rPr kumimoji="1" lang="ja-JP" altLang="en-US" smtClean="0"/>
-              <a:t>2025/7/25</a:t>
+              <a:t>2025/7/28</a:t>
             </a:fld>
             <a:endParaRPr kumimoji="1" lang="ja-JP" altLang="en-US"/>
           </a:p>
@@ -2934,7 +2934,7 @@
           <a:p>
             <a:fld id="{E9CC885B-4903-4D54-9A93-00025F12DED9}" type="datetimeFigureOut">
               <a:rPr kumimoji="1" lang="ja-JP" altLang="en-US" smtClean="0"/>
-              <a:t>2025/7/25</a:t>
+              <a:t>2025/7/28</a:t>
             </a:fld>
             <a:endParaRPr kumimoji="1" lang="ja-JP" altLang="en-US"/>
           </a:p>
@@ -3207,7 +3207,7 @@
           <a:p>
             <a:fld id="{E9CC885B-4903-4D54-9A93-00025F12DED9}" type="datetimeFigureOut">
               <a:rPr kumimoji="1" lang="ja-JP" altLang="en-US" smtClean="0"/>
-              <a:t>2025/7/25</a:t>
+              <a:t>2025/7/28</a:t>
             </a:fld>
             <a:endParaRPr kumimoji="1" lang="ja-JP" altLang="en-US"/>
           </a:p>
@@ -5187,7 +5187,7 @@
         <p:spPr>
           <a:xfrm>
             <a:off x="567542" y="1216429"/>
-            <a:ext cx="6647974" cy="461665"/>
+            <a:ext cx="6647974" cy="830997"/>
           </a:xfrm>
           <a:prstGeom prst="rect">
             <a:avLst/>
@@ -5203,6 +5203,13 @@
             <a:r>
               <a:rPr kumimoji="1" lang="ja-JP" altLang="en-US" sz="2400" dirty="0"/>
               <a:t>アウトラインの仕組みはとてもシンプルです。</a:t>
+            </a:r>
+            <a:endParaRPr kumimoji="1" lang="en-US" altLang="ja-JP" sz="2400" dirty="0"/>
+          </a:p>
+          <a:p>
+            <a:r>
+              <a:rPr lang="ja-JP" altLang="en-US" sz="2400" dirty="0"/>
+              <a:t>（天球の授業を思い出しながら見てみよう）</a:t>
             </a:r>
             <a:endParaRPr kumimoji="1" lang="en-US" altLang="ja-JP" sz="2400" dirty="0"/>
           </a:p>
